--- a/docs/Skintyee-App-Proposal.pptx
+++ b/docs/Skintyee-App-Proposal.pptx
@@ -13,6 +13,7 @@
     <p:sldId id="261" r:id="rId12"/>
     <p:sldId id="262" r:id="rId13"/>
     <p:sldId id="263" r:id="rId14"/>
+    <p:sldId id="264" r:id="rId15"/>
   </p:sldIdLst>
   <p:sldSz cx="12191695" cy="6858000" type="screen4x3"/>
   <p:notesSz cx="6858000" cy="9144000"/>
@@ -4174,8 +4175,8 @@
         </p:nvSpPr>
         <p:spPr>
           <a:xfrm>
-            <a:off x="640080" y="1828800"/>
-            <a:ext cx="2697480" cy="1965960"/>
+            <a:off x="640080" y="1783080"/>
+            <a:ext cx="2697480" cy="1481328"/>
           </a:xfrm>
           <a:prstGeom prst="rect">
             <a:avLst/>
@@ -4220,14 +4221,14 @@
         </p:nvSpPr>
         <p:spPr>
           <a:xfrm>
-            <a:off x="640080" y="1828800"/>
-            <a:ext cx="73152" cy="1965960"/>
+            <a:off x="640080" y="1783080"/>
+            <a:ext cx="73152" cy="1481328"/>
           </a:xfrm>
           <a:prstGeom prst="rect">
             <a:avLst/>
           </a:prstGeom>
           <a:solidFill>
-            <a:srgbClr val="00B8EC"/>
+            <a:srgbClr val="9ECD3B"/>
           </a:solidFill>
           <a:ln>
             <a:noFill/>
@@ -4264,7 +4265,7 @@
         </p:nvSpPr>
         <p:spPr>
           <a:xfrm>
-            <a:off x="868680" y="1993392"/>
+            <a:off x="868680" y="1947672"/>
             <a:ext cx="2331720" cy="457200"/>
           </a:xfrm>
           <a:prstGeom prst="rect">
@@ -4290,7 +4291,7 @@
                 </a:solidFill>
                 <a:latin typeface="Arial"/>
               </a:rPr>
-              <a:t>Band Member Directory</a:t>
+              <a:t>Dashboard</a:t>
             </a:r>
           </a:p>
         </p:txBody>
@@ -4303,8 +4304,8 @@
         </p:nvSpPr>
         <p:spPr>
           <a:xfrm>
-            <a:off x="868680" y="2487168"/>
-            <a:ext cx="2331720" cy="1188720"/>
+            <a:off x="868680" y="2441448"/>
+            <a:ext cx="2331720" cy="704088"/>
           </a:xfrm>
           <a:prstGeom prst="rect">
             <a:avLst/>
@@ -4329,7 +4330,7 @@
                 </a:solidFill>
                 <a:latin typeface="Arial"/>
               </a:rPr>
-              <a:t>Searchable directory; contact details for members.</a:t>
+              <a:t>Community stats + spending charts at a glance.</a:t>
             </a:r>
           </a:p>
         </p:txBody>
@@ -4342,8 +4343,8 @@
         </p:nvSpPr>
         <p:spPr>
           <a:xfrm>
-            <a:off x="3502152" y="1828800"/>
-            <a:ext cx="2697480" cy="1965960"/>
+            <a:off x="3502152" y="1783080"/>
+            <a:ext cx="2697480" cy="1481328"/>
           </a:xfrm>
           <a:prstGeom prst="rect">
             <a:avLst/>
@@ -4388,14 +4389,14 @@
         </p:nvSpPr>
         <p:spPr>
           <a:xfrm>
-            <a:off x="3502152" y="1828800"/>
-            <a:ext cx="73152" cy="1965960"/>
+            <a:off x="3502152" y="1783080"/>
+            <a:ext cx="73152" cy="1481328"/>
           </a:xfrm>
           <a:prstGeom prst="rect">
             <a:avLst/>
           </a:prstGeom>
           <a:solidFill>
-            <a:srgbClr val="00B8EC"/>
+            <a:srgbClr val="9ECD3B"/>
           </a:solidFill>
           <a:ln>
             <a:noFill/>
@@ -4432,7 +4433,7 @@
         </p:nvSpPr>
         <p:spPr>
           <a:xfrm>
-            <a:off x="3730752" y="1993392"/>
+            <a:off x="3730752" y="1947672"/>
             <a:ext cx="2331720" cy="457200"/>
           </a:xfrm>
           <a:prstGeom prst="rect">
@@ -4458,7 +4459,7 @@
                 </a:solidFill>
                 <a:latin typeface="Arial"/>
               </a:rPr>
-              <a:t>Community Events</a:t>
+              <a:t>Transparency</a:t>
             </a:r>
           </a:p>
         </p:txBody>
@@ -4471,8 +4472,8 @@
         </p:nvSpPr>
         <p:spPr>
           <a:xfrm>
-            <a:off x="3730752" y="2487168"/>
-            <a:ext cx="2331720" cy="1188720"/>
+            <a:off x="3730752" y="2441448"/>
+            <a:ext cx="2331720" cy="704088"/>
           </a:xfrm>
           <a:prstGeom prst="rect">
             <a:avLst/>
@@ -4497,7 +4498,7 @@
                 </a:solidFill>
                 <a:latin typeface="Arial"/>
               </a:rPr>
-              <a:t>Public event listings with details and dates.</a:t>
+              <a:t>Band expenditures by area; drill into how much &amp; where.</a:t>
             </a:r>
           </a:p>
         </p:txBody>
@@ -4510,8 +4511,8 @@
         </p:nvSpPr>
         <p:spPr>
           <a:xfrm>
-            <a:off x="6364224" y="1828800"/>
-            <a:ext cx="2697480" cy="1965960"/>
+            <a:off x="6364224" y="1783080"/>
+            <a:ext cx="2697480" cy="1481328"/>
           </a:xfrm>
           <a:prstGeom prst="rect">
             <a:avLst/>
@@ -4556,8 +4557,8 @@
         </p:nvSpPr>
         <p:spPr>
           <a:xfrm>
-            <a:off x="6364224" y="1828800"/>
-            <a:ext cx="73152" cy="1965960"/>
+            <a:off x="6364224" y="1783080"/>
+            <a:ext cx="73152" cy="1481328"/>
           </a:xfrm>
           <a:prstGeom prst="rect">
             <a:avLst/>
@@ -4600,7 +4601,7 @@
         </p:nvSpPr>
         <p:spPr>
           <a:xfrm>
-            <a:off x="6592824" y="1993392"/>
+            <a:off x="6592824" y="1947672"/>
             <a:ext cx="2331720" cy="457200"/>
           </a:xfrm>
           <a:prstGeom prst="rect">
@@ -4626,7 +4627,7 @@
                 </a:solidFill>
                 <a:latin typeface="Arial"/>
               </a:rPr>
-              <a:t>Band Meetings</a:t>
+              <a:t>Band Member Directory</a:t>
             </a:r>
           </a:p>
         </p:txBody>
@@ -4639,8 +4640,8 @@
         </p:nvSpPr>
         <p:spPr>
           <a:xfrm>
-            <a:off x="6592824" y="2487168"/>
-            <a:ext cx="2331720" cy="1188720"/>
+            <a:off x="6592824" y="2441448"/>
+            <a:ext cx="2331720" cy="704088"/>
           </a:xfrm>
           <a:prstGeom prst="rect">
             <a:avLst/>
@@ -4665,7 +4666,7 @@
                 </a:solidFill>
                 <a:latin typeface="Arial"/>
               </a:rPr>
-              <a:t>Agendas, schedules, and minutes for members.</a:t>
+              <a:t>Searchable directory; contact details for members.</a:t>
             </a:r>
           </a:p>
         </p:txBody>
@@ -4678,8 +4679,8 @@
         </p:nvSpPr>
         <p:spPr>
           <a:xfrm>
-            <a:off x="9226296" y="1828800"/>
-            <a:ext cx="2697480" cy="1965960"/>
+            <a:off x="9226296" y="1783080"/>
+            <a:ext cx="2697480" cy="1481328"/>
           </a:xfrm>
           <a:prstGeom prst="rect">
             <a:avLst/>
@@ -4724,8 +4725,8 @@
         </p:nvSpPr>
         <p:spPr>
           <a:xfrm>
-            <a:off x="9226296" y="1828800"/>
-            <a:ext cx="73152" cy="1965960"/>
+            <a:off x="9226296" y="1783080"/>
+            <a:ext cx="73152" cy="1481328"/>
           </a:xfrm>
           <a:prstGeom prst="rect">
             <a:avLst/>
@@ -4768,7 +4769,7 @@
         </p:nvSpPr>
         <p:spPr>
           <a:xfrm>
-            <a:off x="9454896" y="1993392"/>
+            <a:off x="9454896" y="1947672"/>
             <a:ext cx="2331720" cy="457200"/>
           </a:xfrm>
           <a:prstGeom prst="rect">
@@ -4794,7 +4795,7 @@
                 </a:solidFill>
                 <a:latin typeface="Arial"/>
               </a:rPr>
-              <a:t>Public Records</a:t>
+              <a:t>Community Events</a:t>
             </a:r>
           </a:p>
         </p:txBody>
@@ -4807,8 +4808,8 @@
         </p:nvSpPr>
         <p:spPr>
           <a:xfrm>
-            <a:off x="9454896" y="2487168"/>
-            <a:ext cx="2331720" cy="1188720"/>
+            <a:off x="9454896" y="2441448"/>
+            <a:ext cx="2331720" cy="704088"/>
           </a:xfrm>
           <a:prstGeom prst="rect">
             <a:avLst/>
@@ -4833,7 +4834,7 @@
                 </a:solidFill>
                 <a:latin typeface="Arial"/>
               </a:rPr>
-              <a:t>Bylaws, notices, reports, and forms.</a:t>
+              <a:t>Public event listings with details and dates.</a:t>
             </a:r>
           </a:p>
         </p:txBody>
@@ -4846,8 +4847,8 @@
         </p:nvSpPr>
         <p:spPr>
           <a:xfrm>
-            <a:off x="640080" y="4023360"/>
-            <a:ext cx="2697480" cy="1965960"/>
+            <a:off x="640080" y="3447288"/>
+            <a:ext cx="2697480" cy="1481328"/>
           </a:xfrm>
           <a:prstGeom prst="rect">
             <a:avLst/>
@@ -4892,8 +4893,8 @@
         </p:nvSpPr>
         <p:spPr>
           <a:xfrm>
-            <a:off x="640080" y="4023360"/>
-            <a:ext cx="73152" cy="1965960"/>
+            <a:off x="640080" y="3447288"/>
+            <a:ext cx="73152" cy="1481328"/>
           </a:xfrm>
           <a:prstGeom prst="rect">
             <a:avLst/>
@@ -4936,7 +4937,7 @@
         </p:nvSpPr>
         <p:spPr>
           <a:xfrm>
-            <a:off x="868680" y="4187952"/>
+            <a:off x="868680" y="3611880"/>
             <a:ext cx="2331720" cy="457200"/>
           </a:xfrm>
           <a:prstGeom prst="rect">
@@ -4962,7 +4963,7 @@
                 </a:solidFill>
                 <a:latin typeface="Arial"/>
               </a:rPr>
-              <a:t>Time Keeping</a:t>
+              <a:t>Notifications</a:t>
             </a:r>
           </a:p>
         </p:txBody>
@@ -4975,8 +4976,8 @@
         </p:nvSpPr>
         <p:spPr>
           <a:xfrm>
-            <a:off x="868680" y="4681728"/>
-            <a:ext cx="2331720" cy="1188720"/>
+            <a:off x="868680" y="4105656"/>
+            <a:ext cx="2331720" cy="704088"/>
           </a:xfrm>
           <a:prstGeom prst="rect">
             <a:avLst/>
@@ -5001,7 +5002,7 @@
                 </a:solidFill>
                 <a:latin typeface="Arial"/>
               </a:rPr>
-              <a:t>Hours logging &amp; approval for workers (staff).</a:t>
+              <a:t>Health, Safety, Council… synced to skintyee.ca categories.</a:t>
             </a:r>
           </a:p>
         </p:txBody>
@@ -5014,8 +5015,8 @@
         </p:nvSpPr>
         <p:spPr>
           <a:xfrm>
-            <a:off x="3502152" y="4023360"/>
-            <a:ext cx="2697480" cy="1965960"/>
+            <a:off x="3502152" y="3447288"/>
+            <a:ext cx="2697480" cy="1481328"/>
           </a:xfrm>
           <a:prstGeom prst="rect">
             <a:avLst/>
@@ -5060,14 +5061,14 @@
         </p:nvSpPr>
         <p:spPr>
           <a:xfrm>
-            <a:off x="3502152" y="4023360"/>
-            <a:ext cx="73152" cy="1965960"/>
+            <a:off x="3502152" y="3447288"/>
+            <a:ext cx="73152" cy="1481328"/>
           </a:xfrm>
           <a:prstGeom prst="rect">
             <a:avLst/>
           </a:prstGeom>
           <a:solidFill>
-            <a:srgbClr val="EC6A37"/>
+            <a:srgbClr val="00B8EC"/>
           </a:solidFill>
           <a:ln>
             <a:noFill/>
@@ -5104,7 +5105,7 @@
         </p:nvSpPr>
         <p:spPr>
           <a:xfrm>
-            <a:off x="3730752" y="4187952"/>
+            <a:off x="3730752" y="3611880"/>
             <a:ext cx="2331720" cy="457200"/>
           </a:xfrm>
           <a:prstGeom prst="rect">
@@ -5130,7 +5131,7 @@
                 </a:solidFill>
                 <a:latin typeface="Arial"/>
               </a:rPr>
-              <a:t>Financial Records</a:t>
+              <a:t>Band Meetings</a:t>
             </a:r>
           </a:p>
         </p:txBody>
@@ -5143,8 +5144,8 @@
         </p:nvSpPr>
         <p:spPr>
           <a:xfrm>
-            <a:off x="3730752" y="4681728"/>
-            <a:ext cx="2331720" cy="1188720"/>
+            <a:off x="3730752" y="4105656"/>
+            <a:ext cx="2331720" cy="704088"/>
           </a:xfrm>
           <a:prstGeom prst="rect">
             <a:avLst/>
@@ -5169,7 +5170,7 @@
                 </a:solidFill>
                 <a:latin typeface="Arial"/>
               </a:rPr>
-              <a:t>Budgets and statements (admin only).</a:t>
+              <a:t>Agendas, schedules, and minutes for members.</a:t>
             </a:r>
           </a:p>
         </p:txBody>
@@ -5182,8 +5183,8 @@
         </p:nvSpPr>
         <p:spPr>
           <a:xfrm>
-            <a:off x="6364224" y="4023360"/>
-            <a:ext cx="2697480" cy="1965960"/>
+            <a:off x="6364224" y="3447288"/>
+            <a:ext cx="2697480" cy="1481328"/>
           </a:xfrm>
           <a:prstGeom prst="rect">
             <a:avLst/>
@@ -5228,14 +5229,14 @@
         </p:nvSpPr>
         <p:spPr>
           <a:xfrm>
-            <a:off x="6364224" y="4023360"/>
-            <a:ext cx="73152" cy="1965960"/>
+            <a:off x="6364224" y="3447288"/>
+            <a:ext cx="73152" cy="1481328"/>
           </a:xfrm>
           <a:prstGeom prst="rect">
             <a:avLst/>
           </a:prstGeom>
           <a:solidFill>
-            <a:srgbClr val="9ECD3B"/>
+            <a:srgbClr val="EC6A37"/>
           </a:solidFill>
           <a:ln>
             <a:noFill/>
@@ -5272,7 +5273,7 @@
         </p:nvSpPr>
         <p:spPr>
           <a:xfrm>
-            <a:off x="6592824" y="4187952"/>
+            <a:off x="6592824" y="3611880"/>
             <a:ext cx="2331720" cy="457200"/>
           </a:xfrm>
           <a:prstGeom prst="rect">
@@ -5298,7 +5299,7 @@
                 </a:solidFill>
                 <a:latin typeface="Arial"/>
               </a:rPr>
-              <a:t>Polling + Surveys</a:t>
+              <a:t>Time Keeping</a:t>
             </a:r>
           </a:p>
         </p:txBody>
@@ -5311,8 +5312,8 @@
         </p:nvSpPr>
         <p:spPr>
           <a:xfrm>
-            <a:off x="6592824" y="4681728"/>
-            <a:ext cx="2331720" cy="1188720"/>
+            <a:off x="6592824" y="4105656"/>
+            <a:ext cx="2331720" cy="704088"/>
           </a:xfrm>
           <a:prstGeom prst="rect">
             <a:avLst/>
@@ -5337,7 +5338,7 @@
                 </a:solidFill>
                 <a:latin typeface="Arial"/>
               </a:rPr>
-              <a:t>Vote on issues; live results.</a:t>
+              <a:t>Hours logging &amp; approval for workers (staff).</a:t>
             </a:r>
           </a:p>
         </p:txBody>
@@ -5350,8 +5351,8 @@
         </p:nvSpPr>
         <p:spPr>
           <a:xfrm>
-            <a:off x="9226296" y="4023360"/>
-            <a:ext cx="2697480" cy="1965960"/>
+            <a:off x="9226296" y="3447288"/>
+            <a:ext cx="2697480" cy="1481328"/>
           </a:xfrm>
           <a:prstGeom prst="rect">
             <a:avLst/>
@@ -5396,8 +5397,344 @@
         </p:nvSpPr>
         <p:spPr>
           <a:xfrm>
-            <a:off x="9226296" y="4023360"/>
-            <a:ext cx="73152" cy="1965960"/>
+            <a:off x="9226296" y="3447288"/>
+            <a:ext cx="73152" cy="1481328"/>
+          </a:xfrm>
+          <a:prstGeom prst="rect">
+            <a:avLst/>
+          </a:prstGeom>
+          <a:solidFill>
+            <a:srgbClr val="EC6A37"/>
+          </a:solidFill>
+          <a:ln>
+            <a:noFill/>
+          </a:ln>
+          <a:effectLst/>
+        </p:spPr>
+        <p:style>
+          <a:lnRef idx="1">
+            <a:schemeClr val="accent1"/>
+          </a:lnRef>
+          <a:fillRef idx="3">
+            <a:schemeClr val="accent1"/>
+          </a:fillRef>
+          <a:effectRef idx="2">
+            <a:schemeClr val="accent1"/>
+          </a:effectRef>
+          <a:fontRef idx="minor">
+            <a:schemeClr val="lt1"/>
+          </a:fontRef>
+        </p:style>
+        <p:txBody>
+          <a:bodyPr rtlCol="0" anchor="ctr"/>
+          <a:lstStyle/>
+          <a:p>
+            <a:pPr algn="ctr"/>
+          </a:p>
+        </p:txBody>
+      </p:sp>
+      <p:sp>
+        <p:nvSpPr>
+          <p:cNvPr id="36" name="TextBox 35"/>
+          <p:cNvSpPr txBox="1"/>
+          <p:nvPr/>
+        </p:nvSpPr>
+        <p:spPr>
+          <a:xfrm>
+            <a:off x="9454896" y="3611880"/>
+            <a:ext cx="2331720" cy="457200"/>
+          </a:xfrm>
+          <a:prstGeom prst="rect">
+            <a:avLst/>
+          </a:prstGeom>
+          <a:noFill/>
+        </p:spPr>
+        <p:txBody>
+          <a:bodyPr wrap="square" anchor="t">
+            <a:spAutoFit/>
+          </a:bodyPr>
+          <a:lstStyle/>
+          <a:p>
+            <a:pPr algn="l">
+              <a:lnSpc>
+                <a:spcPct val="100000"/>
+              </a:lnSpc>
+            </a:pPr>
+            <a:r>
+              <a:rPr sz="1600" b="1">
+                <a:solidFill>
+                  <a:srgbClr val="FFFFFF"/>
+                </a:solidFill>
+                <a:latin typeface="Arial"/>
+              </a:rPr>
+              <a:t>Financial Records</a:t>
+            </a:r>
+          </a:p>
+        </p:txBody>
+      </p:sp>
+      <p:sp>
+        <p:nvSpPr>
+          <p:cNvPr id="37" name="TextBox 36"/>
+          <p:cNvSpPr txBox="1"/>
+          <p:nvPr/>
+        </p:nvSpPr>
+        <p:spPr>
+          <a:xfrm>
+            <a:off x="9454896" y="4105656"/>
+            <a:ext cx="2331720" cy="704088"/>
+          </a:xfrm>
+          <a:prstGeom prst="rect">
+            <a:avLst/>
+          </a:prstGeom>
+          <a:noFill/>
+        </p:spPr>
+        <p:txBody>
+          <a:bodyPr wrap="square" anchor="t">
+            <a:spAutoFit/>
+          </a:bodyPr>
+          <a:lstStyle/>
+          <a:p>
+            <a:pPr algn="l">
+              <a:lnSpc>
+                <a:spcPct val="110000"/>
+              </a:lnSpc>
+            </a:pPr>
+            <a:r>
+              <a:rPr sz="1250" b="0">
+                <a:solidFill>
+                  <a:srgbClr val="BDC1C6"/>
+                </a:solidFill>
+                <a:latin typeface="Arial"/>
+              </a:rPr>
+              <a:t>Budgets and statements (admin only).</a:t>
+            </a:r>
+          </a:p>
+        </p:txBody>
+      </p:sp>
+      <p:sp>
+        <p:nvSpPr>
+          <p:cNvPr id="38" name="Rectangle 37"/>
+          <p:cNvSpPr/>
+          <p:nvPr/>
+        </p:nvSpPr>
+        <p:spPr>
+          <a:xfrm>
+            <a:off x="640080" y="5111496"/>
+            <a:ext cx="2697480" cy="1481328"/>
+          </a:xfrm>
+          <a:prstGeom prst="rect">
+            <a:avLst/>
+          </a:prstGeom>
+          <a:solidFill>
+            <a:srgbClr val="1D1D1D"/>
+          </a:solidFill>
+          <a:ln w="12700">
+            <a:solidFill>
+              <a:srgbClr val="3A3A3A"/>
+            </a:solidFill>
+          </a:ln>
+          <a:effectLst/>
+        </p:spPr>
+        <p:style>
+          <a:lnRef idx="1">
+            <a:schemeClr val="accent1"/>
+          </a:lnRef>
+          <a:fillRef idx="3">
+            <a:schemeClr val="accent1"/>
+          </a:fillRef>
+          <a:effectRef idx="2">
+            <a:schemeClr val="accent1"/>
+          </a:effectRef>
+          <a:fontRef idx="minor">
+            <a:schemeClr val="lt1"/>
+          </a:fontRef>
+        </p:style>
+        <p:txBody>
+          <a:bodyPr rtlCol="0" anchor="ctr"/>
+          <a:lstStyle/>
+          <a:p>
+            <a:pPr algn="ctr"/>
+          </a:p>
+        </p:txBody>
+      </p:sp>
+      <p:sp>
+        <p:nvSpPr>
+          <p:cNvPr id="39" name="Rectangle 38"/>
+          <p:cNvSpPr/>
+          <p:nvPr/>
+        </p:nvSpPr>
+        <p:spPr>
+          <a:xfrm>
+            <a:off x="640080" y="5111496"/>
+            <a:ext cx="73152" cy="1481328"/>
+          </a:xfrm>
+          <a:prstGeom prst="rect">
+            <a:avLst/>
+          </a:prstGeom>
+          <a:solidFill>
+            <a:srgbClr val="00B8EC"/>
+          </a:solidFill>
+          <a:ln>
+            <a:noFill/>
+          </a:ln>
+          <a:effectLst/>
+        </p:spPr>
+        <p:style>
+          <a:lnRef idx="1">
+            <a:schemeClr val="accent1"/>
+          </a:lnRef>
+          <a:fillRef idx="3">
+            <a:schemeClr val="accent1"/>
+          </a:fillRef>
+          <a:effectRef idx="2">
+            <a:schemeClr val="accent1"/>
+          </a:effectRef>
+          <a:fontRef idx="minor">
+            <a:schemeClr val="lt1"/>
+          </a:fontRef>
+        </p:style>
+        <p:txBody>
+          <a:bodyPr rtlCol="0" anchor="ctr"/>
+          <a:lstStyle/>
+          <a:p>
+            <a:pPr algn="ctr"/>
+          </a:p>
+        </p:txBody>
+      </p:sp>
+      <p:sp>
+        <p:nvSpPr>
+          <p:cNvPr id="40" name="TextBox 39"/>
+          <p:cNvSpPr txBox="1"/>
+          <p:nvPr/>
+        </p:nvSpPr>
+        <p:spPr>
+          <a:xfrm>
+            <a:off x="868680" y="5276088"/>
+            <a:ext cx="2331720" cy="457200"/>
+          </a:xfrm>
+          <a:prstGeom prst="rect">
+            <a:avLst/>
+          </a:prstGeom>
+          <a:noFill/>
+        </p:spPr>
+        <p:txBody>
+          <a:bodyPr wrap="square" anchor="t">
+            <a:spAutoFit/>
+          </a:bodyPr>
+          <a:lstStyle/>
+          <a:p>
+            <a:pPr algn="l">
+              <a:lnSpc>
+                <a:spcPct val="100000"/>
+              </a:lnSpc>
+            </a:pPr>
+            <a:r>
+              <a:rPr sz="1600" b="1">
+                <a:solidFill>
+                  <a:srgbClr val="FFFFFF"/>
+                </a:solidFill>
+                <a:latin typeface="Arial"/>
+              </a:rPr>
+              <a:t>Polling + Surveys</a:t>
+            </a:r>
+          </a:p>
+        </p:txBody>
+      </p:sp>
+      <p:sp>
+        <p:nvSpPr>
+          <p:cNvPr id="41" name="TextBox 40"/>
+          <p:cNvSpPr txBox="1"/>
+          <p:nvPr/>
+        </p:nvSpPr>
+        <p:spPr>
+          <a:xfrm>
+            <a:off x="868680" y="5769864"/>
+            <a:ext cx="2331720" cy="704088"/>
+          </a:xfrm>
+          <a:prstGeom prst="rect">
+            <a:avLst/>
+          </a:prstGeom>
+          <a:noFill/>
+        </p:spPr>
+        <p:txBody>
+          <a:bodyPr wrap="square" anchor="t">
+            <a:spAutoFit/>
+          </a:bodyPr>
+          <a:lstStyle/>
+          <a:p>
+            <a:pPr algn="l">
+              <a:lnSpc>
+                <a:spcPct val="110000"/>
+              </a:lnSpc>
+            </a:pPr>
+            <a:r>
+              <a:rPr sz="1250" b="0">
+                <a:solidFill>
+                  <a:srgbClr val="BDC1C6"/>
+                </a:solidFill>
+                <a:latin typeface="Arial"/>
+              </a:rPr>
+              <a:t>Vote on issues; live results.</a:t>
+            </a:r>
+          </a:p>
+        </p:txBody>
+      </p:sp>
+      <p:sp>
+        <p:nvSpPr>
+          <p:cNvPr id="42" name="Rectangle 41"/>
+          <p:cNvSpPr/>
+          <p:nvPr/>
+        </p:nvSpPr>
+        <p:spPr>
+          <a:xfrm>
+            <a:off x="3502152" y="5111496"/>
+            <a:ext cx="2697480" cy="1481328"/>
+          </a:xfrm>
+          <a:prstGeom prst="rect">
+            <a:avLst/>
+          </a:prstGeom>
+          <a:solidFill>
+            <a:srgbClr val="1D1D1D"/>
+          </a:solidFill>
+          <a:ln w="12700">
+            <a:solidFill>
+              <a:srgbClr val="3A3A3A"/>
+            </a:solidFill>
+          </a:ln>
+          <a:effectLst/>
+        </p:spPr>
+        <p:style>
+          <a:lnRef idx="1">
+            <a:schemeClr val="accent1"/>
+          </a:lnRef>
+          <a:fillRef idx="3">
+            <a:schemeClr val="accent1"/>
+          </a:fillRef>
+          <a:effectRef idx="2">
+            <a:schemeClr val="accent1"/>
+          </a:effectRef>
+          <a:fontRef idx="minor">
+            <a:schemeClr val="lt1"/>
+          </a:fontRef>
+        </p:style>
+        <p:txBody>
+          <a:bodyPr rtlCol="0" anchor="ctr"/>
+          <a:lstStyle/>
+          <a:p>
+            <a:pPr algn="ctr"/>
+          </a:p>
+        </p:txBody>
+      </p:sp>
+      <p:sp>
+        <p:nvSpPr>
+          <p:cNvPr id="43" name="Rectangle 42"/>
+          <p:cNvSpPr/>
+          <p:nvPr/>
+        </p:nvSpPr>
+        <p:spPr>
+          <a:xfrm>
+            <a:off x="3502152" y="5111496"/>
+            <a:ext cx="73152" cy="1481328"/>
           </a:xfrm>
           <a:prstGeom prst="rect">
             <a:avLst/>
@@ -5434,13 +5771,13 @@
       </p:sp>
       <p:sp>
         <p:nvSpPr>
-          <p:cNvPr id="36" name="TextBox 35"/>
+          <p:cNvPr id="44" name="TextBox 43"/>
           <p:cNvSpPr txBox="1"/>
           <p:nvPr/>
         </p:nvSpPr>
         <p:spPr>
           <a:xfrm>
-            <a:off x="9454896" y="4187952"/>
+            <a:off x="3730752" y="5276088"/>
             <a:ext cx="2331720" cy="457200"/>
           </a:xfrm>
           <a:prstGeom prst="rect">
@@ -5466,21 +5803,21 @@
                 </a:solidFill>
                 <a:latin typeface="Arial"/>
               </a:rPr>
-              <a:t>Push &amp; Auto-Publish</a:t>
-            </a:r>
-          </a:p>
-        </p:txBody>
-      </p:sp>
-      <p:sp>
-        <p:nvSpPr>
-          <p:cNvPr id="37" name="TextBox 36"/>
+              <a:t>Auto-Publish</a:t>
+            </a:r>
+          </a:p>
+        </p:txBody>
+      </p:sp>
+      <p:sp>
+        <p:nvSpPr>
+          <p:cNvPr id="45" name="TextBox 44"/>
           <p:cNvSpPr txBox="1"/>
           <p:nvPr/>
         </p:nvSpPr>
         <p:spPr>
           <a:xfrm>
-            <a:off x="9454896" y="4681728"/>
-            <a:ext cx="2331720" cy="1188720"/>
+            <a:off x="3730752" y="5769864"/>
+            <a:ext cx="2331720" cy="704088"/>
           </a:xfrm>
           <a:prstGeom prst="rect">
             <a:avLst/>
@@ -5505,20 +5842,20 @@
                 </a:solidFill>
                 <a:latin typeface="Arial"/>
               </a:rPr>
-              <a:t>Notifications; publish to skintyee.ca.</a:t>
-            </a:r>
-          </a:p>
-        </p:txBody>
-      </p:sp>
-      <p:sp>
-        <p:nvSpPr>
-          <p:cNvPr id="38" name="TextBox 37"/>
+              <a:t>Meetings &amp; events pushed to skintyee.ca.</a:t>
+            </a:r>
+          </a:p>
+        </p:txBody>
+      </p:sp>
+      <p:sp>
+        <p:nvSpPr>
+          <p:cNvPr id="46" name="TextBox 45"/>
           <p:cNvSpPr txBox="1"/>
           <p:nvPr/>
         </p:nvSpPr>
         <p:spPr>
           <a:xfrm>
-            <a:off x="640080" y="6263640"/>
+            <a:off x="640080" y="4617720"/>
             <a:ext cx="10972800" cy="365760"/>
           </a:xfrm>
           <a:prstGeom prst="rect">
@@ -5697,7 +6034,7 @@
                 </a:solidFill>
                 <a:latin typeface="Arial"/>
               </a:rPr>
-              <a:t>ARCHITECTURE</a:t>
+              <a:t>TRANSPARENCY</a:t>
             </a:r>
           </a:p>
         </p:txBody>
@@ -5736,21 +6073,239 @@
                 </a:solidFill>
                 <a:latin typeface="Arial"/>
               </a:rPr>
-              <a:t>Azure end-to-end</a:t>
-            </a:r>
-          </a:p>
-        </p:txBody>
-      </p:sp>
-      <p:sp>
-        <p:nvSpPr>
-          <p:cNvPr id="6" name="Rectangle 5"/>
+              <a:t>Open books, by design</a:t>
+            </a:r>
+          </a:p>
+        </p:txBody>
+      </p:sp>
+      <p:sp>
+        <p:nvSpPr>
+          <p:cNvPr id="6" name="TextBox 5"/>
+          <p:cNvSpPr txBox="1"/>
+          <p:nvPr/>
+        </p:nvSpPr>
+        <p:spPr>
+          <a:xfrm>
+            <a:off x="640080" y="1828800"/>
+            <a:ext cx="6583680" cy="4206240"/>
+          </a:xfrm>
+          <a:prstGeom prst="rect">
+            <a:avLst/>
+          </a:prstGeom>
+          <a:noFill/>
+        </p:spPr>
+        <p:txBody>
+          <a:bodyPr wrap="square">
+            <a:spAutoFit/>
+          </a:bodyPr>
+          <a:lstStyle/>
+          <a:p>
+            <a:pPr>
+              <a:lnSpc>
+                <a:spcPct val="140000"/>
+              </a:lnSpc>
+            </a:pPr>
+            <a:r>
+              <a:rPr sz="1600" b="1">
+                <a:solidFill>
+                  <a:srgbClr val="00B8EC"/>
+                </a:solidFill>
+                <a:latin typeface="Arial"/>
+              </a:rPr>
+              <a:t>▸  </a:t>
+            </a:r>
+            <a:r>
+              <a:rPr sz="1600" b="1">
+                <a:solidFill>
+                  <a:srgbClr val="FFFFFF"/>
+                </a:solidFill>
+                <a:latin typeface="Arial"/>
+              </a:rPr>
+              <a:t>Where the money goes:  </a:t>
+            </a:r>
+            <a:r>
+              <a:rPr sz="1600">
+                <a:solidFill>
+                  <a:srgbClr val="BDC1C6"/>
+                </a:solidFill>
+                <a:latin typeface="Arial"/>
+              </a:rPr>
+              <a:t>public band expenditures by program area.</a:t>
+            </a:r>
+          </a:p>
+          <a:p>
+            <a:pPr>
+              <a:lnSpc>
+                <a:spcPct val="140000"/>
+              </a:lnSpc>
+            </a:pPr>
+            <a:r>
+              <a:rPr sz="1600" b="1">
+                <a:solidFill>
+                  <a:srgbClr val="00B8EC"/>
+                </a:solidFill>
+                <a:latin typeface="Arial"/>
+              </a:rPr>
+              <a:t>▸  </a:t>
+            </a:r>
+            <a:r>
+              <a:rPr sz="1600" b="1">
+                <a:solidFill>
+                  <a:srgbClr val="FFFFFF"/>
+                </a:solidFill>
+                <a:latin typeface="Arial"/>
+              </a:rPr>
+              <a:t>Areas:  </a:t>
+            </a:r>
+            <a:r>
+              <a:rPr sz="1600">
+                <a:solidFill>
+                  <a:srgbClr val="BDC1C6"/>
+                </a:solidFill>
+                <a:latin typeface="Arial"/>
+              </a:rPr>
+              <a:t>Housing, Public Works, Education, Employment, Health, Social</a:t>
+            </a:r>
+          </a:p>
+          <a:p>
+            <a:pPr>
+              <a:lnSpc>
+                <a:spcPct val="140000"/>
+              </a:lnSpc>
+            </a:pPr>
+            <a:r>
+              <a:rPr sz="1600" b="1">
+                <a:solidFill>
+                  <a:srgbClr val="00B8EC"/>
+                </a:solidFill>
+                <a:latin typeface="Arial"/>
+              </a:rPr>
+              <a:t>▸  </a:t>
+            </a:r>
+            <a:r>
+              <a:rPr sz="1600">
+                <a:solidFill>
+                  <a:srgbClr val="BDC1C6"/>
+                </a:solidFill>
+                <a:latin typeface="Arial"/>
+              </a:rPr>
+              <a:t>Assistance, Child &amp; Family Services, IT, Administration.</a:t>
+            </a:r>
+          </a:p>
+          <a:p>
+            <a:pPr>
+              <a:lnSpc>
+                <a:spcPct val="140000"/>
+              </a:lnSpc>
+            </a:pPr>
+            <a:r>
+              <a:rPr sz="1600" b="1">
+                <a:solidFill>
+                  <a:srgbClr val="00B8EC"/>
+                </a:solidFill>
+                <a:latin typeface="Arial"/>
+              </a:rPr>
+              <a:t>▸  </a:t>
+            </a:r>
+            <a:r>
+              <a:rPr sz="1600" b="1">
+                <a:solidFill>
+                  <a:srgbClr val="FFFFFF"/>
+                </a:solidFill>
+                <a:latin typeface="Arial"/>
+              </a:rPr>
+              <a:t>Drill down:  </a:t>
+            </a:r>
+            <a:r>
+              <a:rPr sz="1600">
+                <a:solidFill>
+                  <a:srgbClr val="BDC1C6"/>
+                </a:solidFill>
+                <a:latin typeface="Arial"/>
+              </a:rPr>
+              <a:t>tap any area to see how much was spent and where.</a:t>
+            </a:r>
+          </a:p>
+          <a:p>
+            <a:pPr>
+              <a:lnSpc>
+                <a:spcPct val="140000"/>
+              </a:lnSpc>
+            </a:pPr>
+            <a:r>
+              <a:rPr sz="1600" b="1">
+                <a:solidFill>
+                  <a:srgbClr val="00B8EC"/>
+                </a:solidFill>
+                <a:latin typeface="Arial"/>
+              </a:rPr>
+              <a:t>▸  </a:t>
+            </a:r>
+            <a:r>
+              <a:rPr sz="1600" b="1">
+                <a:solidFill>
+                  <a:srgbClr val="FFFFFF"/>
+                </a:solidFill>
+                <a:latin typeface="Arial"/>
+              </a:rPr>
+              <a:t>Dashboard:  </a:t>
+            </a:r>
+            <a:r>
+              <a:rPr sz="1600">
+                <a:solidFill>
+                  <a:srgbClr val="BDC1C6"/>
+                </a:solidFill>
+                <a:latin typeface="Arial"/>
+              </a:rPr>
+              <a:t>community stats + spending charts at a glance.</a:t>
+            </a:r>
+          </a:p>
+          <a:p>
+            <a:pPr>
+              <a:lnSpc>
+                <a:spcPct val="140000"/>
+              </a:lnSpc>
+            </a:pPr>
+            <a:r>
+              <a:rPr sz="1600" b="1">
+                <a:solidFill>
+                  <a:srgbClr val="00B8EC"/>
+                </a:solidFill>
+                <a:latin typeface="Arial"/>
+              </a:rPr>
+              <a:t>▸  </a:t>
+            </a:r>
+            <a:r>
+              <a:rPr sz="1600" b="1">
+                <a:solidFill>
+                  <a:srgbClr val="FFFFFF"/>
+                </a:solidFill>
+                <a:latin typeface="Arial"/>
+              </a:rPr>
+              <a:t>Sourced from:  </a:t>
+            </a:r>
+            <a:r>
+              <a:rPr sz="1600">
+                <a:solidFill>
+                  <a:srgbClr val="BDC1C6"/>
+                </a:solidFill>
+                <a:latin typeface="Arial"/>
+              </a:rPr>
+              <a:t>Ferrus ASAP Suite + Adagio / Sage 300 (when integrated).</a:t>
+            </a:r>
+          </a:p>
+        </p:txBody>
+      </p:sp>
+      <p:sp>
+        <p:nvSpPr>
+          <p:cNvPr id="7" name="Rectangle 6"/>
           <p:cNvSpPr/>
           <p:nvPr/>
         </p:nvSpPr>
         <p:spPr>
           <a:xfrm>
-            <a:off x="640080" y="1828800"/>
-            <a:ext cx="3520440" cy="1828800"/>
+            <a:off x="7498079" y="1828800"/>
+            <a:ext cx="4114800" cy="4206240"/>
           </a:xfrm>
           <a:prstGeom prst="rect">
             <a:avLst/>
@@ -5789,854 +6344,14 @@
       </p:sp>
       <p:sp>
         <p:nvSpPr>
-          <p:cNvPr id="7" name="Rectangle 6"/>
+          <p:cNvPr id="8" name="Rectangle 7"/>
           <p:cNvSpPr/>
           <p:nvPr/>
         </p:nvSpPr>
         <p:spPr>
           <a:xfrm>
-            <a:off x="640080" y="1828800"/>
-            <a:ext cx="73152" cy="1828800"/>
-          </a:xfrm>
-          <a:prstGeom prst="rect">
-            <a:avLst/>
-          </a:prstGeom>
-          <a:solidFill>
-            <a:srgbClr val="00B8EC"/>
-          </a:solidFill>
-          <a:ln>
-            <a:noFill/>
-          </a:ln>
-          <a:effectLst/>
-        </p:spPr>
-        <p:style>
-          <a:lnRef idx="1">
-            <a:schemeClr val="accent1"/>
-          </a:lnRef>
-          <a:fillRef idx="3">
-            <a:schemeClr val="accent1"/>
-          </a:fillRef>
-          <a:effectRef idx="2">
-            <a:schemeClr val="accent1"/>
-          </a:effectRef>
-          <a:fontRef idx="minor">
-            <a:schemeClr val="lt1"/>
-          </a:fontRef>
-        </p:style>
-        <p:txBody>
-          <a:bodyPr rtlCol="0" anchor="ctr"/>
-          <a:lstStyle/>
-          <a:p>
-            <a:pPr algn="ctr"/>
-          </a:p>
-        </p:txBody>
-      </p:sp>
-      <p:sp>
-        <p:nvSpPr>
-          <p:cNvPr id="8" name="TextBox 7"/>
-          <p:cNvSpPr txBox="1"/>
-          <p:nvPr/>
-        </p:nvSpPr>
-        <p:spPr>
-          <a:xfrm>
-            <a:off x="868680" y="1993392"/>
-            <a:ext cx="3154680" cy="457200"/>
-          </a:xfrm>
-          <a:prstGeom prst="rect">
-            <a:avLst/>
-          </a:prstGeom>
-          <a:noFill/>
-        </p:spPr>
-        <p:txBody>
-          <a:bodyPr wrap="square" anchor="t">
-            <a:spAutoFit/>
-          </a:bodyPr>
-          <a:lstStyle/>
-          <a:p>
-            <a:pPr algn="l">
-              <a:lnSpc>
-                <a:spcPct val="100000"/>
-              </a:lnSpc>
-            </a:pPr>
-            <a:r>
-              <a:rPr sz="1600" b="1">
-                <a:solidFill>
-                  <a:srgbClr val="FFFFFF"/>
-                </a:solidFill>
-                <a:latin typeface="Arial"/>
-              </a:rPr>
-              <a:t>Skintyee App</a:t>
-            </a:r>
-          </a:p>
-        </p:txBody>
-      </p:sp>
-      <p:sp>
-        <p:nvSpPr>
-          <p:cNvPr id="9" name="TextBox 8"/>
-          <p:cNvSpPr txBox="1"/>
-          <p:nvPr/>
-        </p:nvSpPr>
-        <p:spPr>
-          <a:xfrm>
-            <a:off x="868680" y="2487168"/>
-            <a:ext cx="3154680" cy="1051560"/>
-          </a:xfrm>
-          <a:prstGeom prst="rect">
-            <a:avLst/>
-          </a:prstGeom>
-          <a:noFill/>
-        </p:spPr>
-        <p:txBody>
-          <a:bodyPr wrap="square" anchor="t">
-            <a:spAutoFit/>
-          </a:bodyPr>
-          <a:lstStyle/>
-          <a:p>
-            <a:pPr algn="l">
-              <a:lnSpc>
-                <a:spcPct val="110000"/>
-              </a:lnSpc>
-            </a:pPr>
-            <a:r>
-              <a:rPr sz="1250" b="0">
-                <a:solidFill>
-                  <a:srgbClr val="BDC1C6"/>
-                </a:solidFill>
-                <a:latin typeface="Arial"/>
-              </a:rPr>
-              <a:t>React Native + Expo. iOS, Android, and web from one codebase. Material UI, role-based menus.</a:t>
-            </a:r>
-          </a:p>
-        </p:txBody>
-      </p:sp>
-      <p:sp>
-        <p:nvSpPr>
-          <p:cNvPr id="10" name="Rectangle 9"/>
-          <p:cNvSpPr/>
-          <p:nvPr/>
-        </p:nvSpPr>
-        <p:spPr>
-          <a:xfrm>
-            <a:off x="4334256" y="1828800"/>
-            <a:ext cx="3520440" cy="1828800"/>
-          </a:xfrm>
-          <a:prstGeom prst="rect">
-            <a:avLst/>
-          </a:prstGeom>
-          <a:solidFill>
-            <a:srgbClr val="1D1D1D"/>
-          </a:solidFill>
-          <a:ln w="12700">
-            <a:solidFill>
-              <a:srgbClr val="3A3A3A"/>
-            </a:solidFill>
-          </a:ln>
-          <a:effectLst/>
-        </p:spPr>
-        <p:style>
-          <a:lnRef idx="1">
-            <a:schemeClr val="accent1"/>
-          </a:lnRef>
-          <a:fillRef idx="3">
-            <a:schemeClr val="accent1"/>
-          </a:fillRef>
-          <a:effectRef idx="2">
-            <a:schemeClr val="accent1"/>
-          </a:effectRef>
-          <a:fontRef idx="minor">
-            <a:schemeClr val="lt1"/>
-          </a:fontRef>
-        </p:style>
-        <p:txBody>
-          <a:bodyPr rtlCol="0" anchor="ctr"/>
-          <a:lstStyle/>
-          <a:p>
-            <a:pPr algn="ctr"/>
-          </a:p>
-        </p:txBody>
-      </p:sp>
-      <p:sp>
-        <p:nvSpPr>
-          <p:cNvPr id="11" name="Rectangle 10"/>
-          <p:cNvSpPr/>
-          <p:nvPr/>
-        </p:nvSpPr>
-        <p:spPr>
-          <a:xfrm>
-            <a:off x="4334256" y="1828800"/>
-            <a:ext cx="73152" cy="1828800"/>
-          </a:xfrm>
-          <a:prstGeom prst="rect">
-            <a:avLst/>
-          </a:prstGeom>
-          <a:solidFill>
-            <a:srgbClr val="EC6A37"/>
-          </a:solidFill>
-          <a:ln>
-            <a:noFill/>
-          </a:ln>
-          <a:effectLst/>
-        </p:spPr>
-        <p:style>
-          <a:lnRef idx="1">
-            <a:schemeClr val="accent1"/>
-          </a:lnRef>
-          <a:fillRef idx="3">
-            <a:schemeClr val="accent1"/>
-          </a:fillRef>
-          <a:effectRef idx="2">
-            <a:schemeClr val="accent1"/>
-          </a:effectRef>
-          <a:fontRef idx="minor">
-            <a:schemeClr val="lt1"/>
-          </a:fontRef>
-        </p:style>
-        <p:txBody>
-          <a:bodyPr rtlCol="0" anchor="ctr"/>
-          <a:lstStyle/>
-          <a:p>
-            <a:pPr algn="ctr"/>
-          </a:p>
-        </p:txBody>
-      </p:sp>
-      <p:sp>
-        <p:nvSpPr>
-          <p:cNvPr id="12" name="TextBox 11"/>
-          <p:cNvSpPr txBox="1"/>
-          <p:nvPr/>
-        </p:nvSpPr>
-        <p:spPr>
-          <a:xfrm>
-            <a:off x="4562856" y="1993392"/>
-            <a:ext cx="3154680" cy="457200"/>
-          </a:xfrm>
-          <a:prstGeom prst="rect">
-            <a:avLst/>
-          </a:prstGeom>
-          <a:noFill/>
-        </p:spPr>
-        <p:txBody>
-          <a:bodyPr wrap="square" anchor="t">
-            <a:spAutoFit/>
-          </a:bodyPr>
-          <a:lstStyle/>
-          <a:p>
-            <a:pPr algn="l">
-              <a:lnSpc>
-                <a:spcPct val="100000"/>
-              </a:lnSpc>
-            </a:pPr>
-            <a:r>
-              <a:rPr sz="1600" b="1">
-                <a:solidFill>
-                  <a:srgbClr val="FFFFFF"/>
-                </a:solidFill>
-                <a:latin typeface="Arial"/>
-              </a:rPr>
-              <a:t>Microsoft Entra ID</a:t>
-            </a:r>
-          </a:p>
-        </p:txBody>
-      </p:sp>
-      <p:sp>
-        <p:nvSpPr>
-          <p:cNvPr id="13" name="TextBox 12"/>
-          <p:cNvSpPr txBox="1"/>
-          <p:nvPr/>
-        </p:nvSpPr>
-        <p:spPr>
-          <a:xfrm>
-            <a:off x="4562856" y="2487168"/>
-            <a:ext cx="3154680" cy="1051560"/>
-          </a:xfrm>
-          <a:prstGeom prst="rect">
-            <a:avLst/>
-          </a:prstGeom>
-          <a:noFill/>
-        </p:spPr>
-        <p:txBody>
-          <a:bodyPr wrap="square" anchor="t">
-            <a:spAutoFit/>
-          </a:bodyPr>
-          <a:lstStyle/>
-          <a:p>
-            <a:pPr algn="l">
-              <a:lnSpc>
-                <a:spcPct val="110000"/>
-              </a:lnSpc>
-            </a:pPr>
-            <a:r>
-              <a:rPr sz="1250" b="0">
-                <a:solidFill>
-                  <a:srgbClr val="BDC1C6"/>
-                </a:solidFill>
-                <a:latin typeface="Arial"/>
-              </a:rPr>
-              <a:t>Identity &amp; sign-in (Azure AD). App roles map to Public / Member / Admin. Replaces AWS Cognito.</a:t>
-            </a:r>
-          </a:p>
-        </p:txBody>
-      </p:sp>
-      <p:sp>
-        <p:nvSpPr>
-          <p:cNvPr id="14" name="Rectangle 13"/>
-          <p:cNvSpPr/>
-          <p:nvPr/>
-        </p:nvSpPr>
-        <p:spPr>
-          <a:xfrm>
-            <a:off x="8028431" y="1828800"/>
-            <a:ext cx="3520440" cy="1828800"/>
-          </a:xfrm>
-          <a:prstGeom prst="rect">
-            <a:avLst/>
-          </a:prstGeom>
-          <a:solidFill>
-            <a:srgbClr val="1D1D1D"/>
-          </a:solidFill>
-          <a:ln w="12700">
-            <a:solidFill>
-              <a:srgbClr val="3A3A3A"/>
-            </a:solidFill>
-          </a:ln>
-          <a:effectLst/>
-        </p:spPr>
-        <p:style>
-          <a:lnRef idx="1">
-            <a:schemeClr val="accent1"/>
-          </a:lnRef>
-          <a:fillRef idx="3">
-            <a:schemeClr val="accent1"/>
-          </a:fillRef>
-          <a:effectRef idx="2">
-            <a:schemeClr val="accent1"/>
-          </a:effectRef>
-          <a:fontRef idx="minor">
-            <a:schemeClr val="lt1"/>
-          </a:fontRef>
-        </p:style>
-        <p:txBody>
-          <a:bodyPr rtlCol="0" anchor="ctr"/>
-          <a:lstStyle/>
-          <a:p>
-            <a:pPr algn="ctr"/>
-          </a:p>
-        </p:txBody>
-      </p:sp>
-      <p:sp>
-        <p:nvSpPr>
-          <p:cNvPr id="15" name="Rectangle 14"/>
-          <p:cNvSpPr/>
-          <p:nvPr/>
-        </p:nvSpPr>
-        <p:spPr>
-          <a:xfrm>
-            <a:off x="8028431" y="1828800"/>
-            <a:ext cx="73152" cy="1828800"/>
-          </a:xfrm>
-          <a:prstGeom prst="rect">
-            <a:avLst/>
-          </a:prstGeom>
-          <a:solidFill>
-            <a:srgbClr val="EC6A37"/>
-          </a:solidFill>
-          <a:ln>
-            <a:noFill/>
-          </a:ln>
-          <a:effectLst/>
-        </p:spPr>
-        <p:style>
-          <a:lnRef idx="1">
-            <a:schemeClr val="accent1"/>
-          </a:lnRef>
-          <a:fillRef idx="3">
-            <a:schemeClr val="accent1"/>
-          </a:fillRef>
-          <a:effectRef idx="2">
-            <a:schemeClr val="accent1"/>
-          </a:effectRef>
-          <a:fontRef idx="minor">
-            <a:schemeClr val="lt1"/>
-          </a:fontRef>
-        </p:style>
-        <p:txBody>
-          <a:bodyPr rtlCol="0" anchor="ctr"/>
-          <a:lstStyle/>
-          <a:p>
-            <a:pPr algn="ctr"/>
-          </a:p>
-        </p:txBody>
-      </p:sp>
-      <p:sp>
-        <p:nvSpPr>
-          <p:cNvPr id="16" name="TextBox 15"/>
-          <p:cNvSpPr txBox="1"/>
-          <p:nvPr/>
-        </p:nvSpPr>
-        <p:spPr>
-          <a:xfrm>
-            <a:off x="8257031" y="1993392"/>
-            <a:ext cx="3154680" cy="457200"/>
-          </a:xfrm>
-          <a:prstGeom prst="rect">
-            <a:avLst/>
-          </a:prstGeom>
-          <a:noFill/>
-        </p:spPr>
-        <p:txBody>
-          <a:bodyPr wrap="square" anchor="t">
-            <a:spAutoFit/>
-          </a:bodyPr>
-          <a:lstStyle/>
-          <a:p>
-            <a:pPr algn="l">
-              <a:lnSpc>
-                <a:spcPct val="100000"/>
-              </a:lnSpc>
-            </a:pPr>
-            <a:r>
-              <a:rPr sz="1600" b="1">
-                <a:solidFill>
-                  <a:srgbClr val="FFFFFF"/>
-                </a:solidFill>
-                <a:latin typeface="Arial"/>
-              </a:rPr>
-              <a:t>Azure Blob Storage</a:t>
-            </a:r>
-          </a:p>
-        </p:txBody>
-      </p:sp>
-      <p:sp>
-        <p:nvSpPr>
-          <p:cNvPr id="17" name="TextBox 16"/>
-          <p:cNvSpPr txBox="1"/>
-          <p:nvPr/>
-        </p:nvSpPr>
-        <p:spPr>
-          <a:xfrm>
-            <a:off x="8257031" y="2487168"/>
-            <a:ext cx="3154680" cy="1051560"/>
-          </a:xfrm>
-          <a:prstGeom prst="rect">
-            <a:avLst/>
-          </a:prstGeom>
-          <a:noFill/>
-        </p:spPr>
-        <p:txBody>
-          <a:bodyPr wrap="square" anchor="t">
-            <a:spAutoFit/>
-          </a:bodyPr>
-          <a:lstStyle/>
-          <a:p>
-            <a:pPr algn="l">
-              <a:lnSpc>
-                <a:spcPct val="110000"/>
-              </a:lnSpc>
-            </a:pPr>
-            <a:r>
-              <a:rPr sz="1250" b="0">
-                <a:solidFill>
-                  <a:srgbClr val="BDC1C6"/>
-                </a:solidFill>
-                <a:latin typeface="Arial"/>
-              </a:rPr>
-              <a:t>Documents &amp; media. Durable, backed-up. Replaces AWS S3.</a:t>
-            </a:r>
-          </a:p>
-        </p:txBody>
-      </p:sp>
-      <p:sp>
-        <p:nvSpPr>
-          <p:cNvPr id="18" name="Rectangle 17"/>
-          <p:cNvSpPr/>
-          <p:nvPr/>
-        </p:nvSpPr>
-        <p:spPr>
-          <a:xfrm>
-            <a:off x="640080" y="3840480"/>
-            <a:ext cx="3520440" cy="1828800"/>
-          </a:xfrm>
-          <a:prstGeom prst="rect">
-            <a:avLst/>
-          </a:prstGeom>
-          <a:solidFill>
-            <a:srgbClr val="1D1D1D"/>
-          </a:solidFill>
-          <a:ln w="12700">
-            <a:solidFill>
-              <a:srgbClr val="3A3A3A"/>
-            </a:solidFill>
-          </a:ln>
-          <a:effectLst/>
-        </p:spPr>
-        <p:style>
-          <a:lnRef idx="1">
-            <a:schemeClr val="accent1"/>
-          </a:lnRef>
-          <a:fillRef idx="3">
-            <a:schemeClr val="accent1"/>
-          </a:fillRef>
-          <a:effectRef idx="2">
-            <a:schemeClr val="accent1"/>
-          </a:effectRef>
-          <a:fontRef idx="minor">
-            <a:schemeClr val="lt1"/>
-          </a:fontRef>
-        </p:style>
-        <p:txBody>
-          <a:bodyPr rtlCol="0" anchor="ctr"/>
-          <a:lstStyle/>
-          <a:p>
-            <a:pPr algn="ctr"/>
-          </a:p>
-        </p:txBody>
-      </p:sp>
-      <p:sp>
-        <p:nvSpPr>
-          <p:cNvPr id="19" name="Rectangle 18"/>
-          <p:cNvSpPr/>
-          <p:nvPr/>
-        </p:nvSpPr>
-        <p:spPr>
-          <a:xfrm>
-            <a:off x="640080" y="3840480"/>
-            <a:ext cx="73152" cy="1828800"/>
-          </a:xfrm>
-          <a:prstGeom prst="rect">
-            <a:avLst/>
-          </a:prstGeom>
-          <a:solidFill>
-            <a:srgbClr val="00B8EC"/>
-          </a:solidFill>
-          <a:ln>
-            <a:noFill/>
-          </a:ln>
-          <a:effectLst/>
-        </p:spPr>
-        <p:style>
-          <a:lnRef idx="1">
-            <a:schemeClr val="accent1"/>
-          </a:lnRef>
-          <a:fillRef idx="3">
-            <a:schemeClr val="accent1"/>
-          </a:fillRef>
-          <a:effectRef idx="2">
-            <a:schemeClr val="accent1"/>
-          </a:effectRef>
-          <a:fontRef idx="minor">
-            <a:schemeClr val="lt1"/>
-          </a:fontRef>
-        </p:style>
-        <p:txBody>
-          <a:bodyPr rtlCol="0" anchor="ctr"/>
-          <a:lstStyle/>
-          <a:p>
-            <a:pPr algn="ctr"/>
-          </a:p>
-        </p:txBody>
-      </p:sp>
-      <p:sp>
-        <p:nvSpPr>
-          <p:cNvPr id="20" name="TextBox 19"/>
-          <p:cNvSpPr txBox="1"/>
-          <p:nvPr/>
-        </p:nvSpPr>
-        <p:spPr>
-          <a:xfrm>
-            <a:off x="868680" y="4005072"/>
-            <a:ext cx="3154680" cy="457200"/>
-          </a:xfrm>
-          <a:prstGeom prst="rect">
-            <a:avLst/>
-          </a:prstGeom>
-          <a:noFill/>
-        </p:spPr>
-        <p:txBody>
-          <a:bodyPr wrap="square" anchor="t">
-            <a:spAutoFit/>
-          </a:bodyPr>
-          <a:lstStyle/>
-          <a:p>
-            <a:pPr algn="l">
-              <a:lnSpc>
-                <a:spcPct val="100000"/>
-              </a:lnSpc>
-            </a:pPr>
-            <a:r>
-              <a:rPr sz="1600" b="1">
-                <a:solidFill>
-                  <a:srgbClr val="FFFFFF"/>
-                </a:solidFill>
-                <a:latin typeface="Arial"/>
-              </a:rPr>
-              <a:t>API Server</a:t>
-            </a:r>
-          </a:p>
-        </p:txBody>
-      </p:sp>
-      <p:sp>
-        <p:nvSpPr>
-          <p:cNvPr id="21" name="TextBox 20"/>
-          <p:cNvSpPr txBox="1"/>
-          <p:nvPr/>
-        </p:nvSpPr>
-        <p:spPr>
-          <a:xfrm>
-            <a:off x="868680" y="4498848"/>
-            <a:ext cx="3154680" cy="1051560"/>
-          </a:xfrm>
-          <a:prstGeom prst="rect">
-            <a:avLst/>
-          </a:prstGeom>
-          <a:noFill/>
-        </p:spPr>
-        <p:txBody>
-          <a:bodyPr wrap="square" anchor="t">
-            <a:spAutoFit/>
-          </a:bodyPr>
-          <a:lstStyle/>
-          <a:p>
-            <a:pPr algn="l">
-              <a:lnSpc>
-                <a:spcPct val="110000"/>
-              </a:lnSpc>
-            </a:pPr>
-            <a:r>
-              <a:rPr sz="1250" b="0">
-                <a:solidFill>
-                  <a:srgbClr val="BDC1C6"/>
-                </a:solidFill>
-                <a:latin typeface="Arial"/>
-              </a:rPr>
-              <a:t>App.SkinTyee.ca. Serves all app data; enforces role permissions.</a:t>
-            </a:r>
-          </a:p>
-        </p:txBody>
-      </p:sp>
-      <p:sp>
-        <p:nvSpPr>
-          <p:cNvPr id="22" name="Rectangle 21"/>
-          <p:cNvSpPr/>
-          <p:nvPr/>
-        </p:nvSpPr>
-        <p:spPr>
-          <a:xfrm>
-            <a:off x="4334256" y="3840480"/>
-            <a:ext cx="3520440" cy="1828800"/>
-          </a:xfrm>
-          <a:prstGeom prst="rect">
-            <a:avLst/>
-          </a:prstGeom>
-          <a:solidFill>
-            <a:srgbClr val="1D1D1D"/>
-          </a:solidFill>
-          <a:ln w="12700">
-            <a:solidFill>
-              <a:srgbClr val="3A3A3A"/>
-            </a:solidFill>
-          </a:ln>
-          <a:effectLst/>
-        </p:spPr>
-        <p:style>
-          <a:lnRef idx="1">
-            <a:schemeClr val="accent1"/>
-          </a:lnRef>
-          <a:fillRef idx="3">
-            <a:schemeClr val="accent1"/>
-          </a:fillRef>
-          <a:effectRef idx="2">
-            <a:schemeClr val="accent1"/>
-          </a:effectRef>
-          <a:fontRef idx="minor">
-            <a:schemeClr val="lt1"/>
-          </a:fontRef>
-        </p:style>
-        <p:txBody>
-          <a:bodyPr rtlCol="0" anchor="ctr"/>
-          <a:lstStyle/>
-          <a:p>
-            <a:pPr algn="ctr"/>
-          </a:p>
-        </p:txBody>
-      </p:sp>
-      <p:sp>
-        <p:nvSpPr>
-          <p:cNvPr id="23" name="Rectangle 22"/>
-          <p:cNvSpPr/>
-          <p:nvPr/>
-        </p:nvSpPr>
-        <p:spPr>
-          <a:xfrm>
-            <a:off x="4334256" y="3840480"/>
-            <a:ext cx="73152" cy="1828800"/>
-          </a:xfrm>
-          <a:prstGeom prst="rect">
-            <a:avLst/>
-          </a:prstGeom>
-          <a:solidFill>
-            <a:srgbClr val="00B8EC"/>
-          </a:solidFill>
-          <a:ln>
-            <a:noFill/>
-          </a:ln>
-          <a:effectLst/>
-        </p:spPr>
-        <p:style>
-          <a:lnRef idx="1">
-            <a:schemeClr val="accent1"/>
-          </a:lnRef>
-          <a:fillRef idx="3">
-            <a:schemeClr val="accent1"/>
-          </a:fillRef>
-          <a:effectRef idx="2">
-            <a:schemeClr val="accent1"/>
-          </a:effectRef>
-          <a:fontRef idx="minor">
-            <a:schemeClr val="lt1"/>
-          </a:fontRef>
-        </p:style>
-        <p:txBody>
-          <a:bodyPr rtlCol="0" anchor="ctr"/>
-          <a:lstStyle/>
-          <a:p>
-            <a:pPr algn="ctr"/>
-          </a:p>
-        </p:txBody>
-      </p:sp>
-      <p:sp>
-        <p:nvSpPr>
-          <p:cNvPr id="24" name="TextBox 23"/>
-          <p:cNvSpPr txBox="1"/>
-          <p:nvPr/>
-        </p:nvSpPr>
-        <p:spPr>
-          <a:xfrm>
-            <a:off x="4562856" y="4005072"/>
-            <a:ext cx="3154680" cy="457200"/>
-          </a:xfrm>
-          <a:prstGeom prst="rect">
-            <a:avLst/>
-          </a:prstGeom>
-          <a:noFill/>
-        </p:spPr>
-        <p:txBody>
-          <a:bodyPr wrap="square" anchor="t">
-            <a:spAutoFit/>
-          </a:bodyPr>
-          <a:lstStyle/>
-          <a:p>
-            <a:pPr algn="l">
-              <a:lnSpc>
-                <a:spcPct val="100000"/>
-              </a:lnSpc>
-            </a:pPr>
-            <a:r>
-              <a:rPr sz="1600" b="1">
-                <a:solidFill>
-                  <a:srgbClr val="FFFFFF"/>
-                </a:solidFill>
-                <a:latin typeface="Arial"/>
-              </a:rPr>
-              <a:t>Azure Cloud DB</a:t>
-            </a:r>
-          </a:p>
-        </p:txBody>
-      </p:sp>
-      <p:sp>
-        <p:nvSpPr>
-          <p:cNvPr id="25" name="TextBox 24"/>
-          <p:cNvSpPr txBox="1"/>
-          <p:nvPr/>
-        </p:nvSpPr>
-        <p:spPr>
-          <a:xfrm>
-            <a:off x="4562856" y="4498848"/>
-            <a:ext cx="3154680" cy="1051560"/>
-          </a:xfrm>
-          <a:prstGeom prst="rect">
-            <a:avLst/>
-          </a:prstGeom>
-          <a:noFill/>
-        </p:spPr>
-        <p:txBody>
-          <a:bodyPr wrap="square" anchor="t">
-            <a:spAutoFit/>
-          </a:bodyPr>
-          <a:lstStyle/>
-          <a:p>
-            <a:pPr algn="l">
-              <a:lnSpc>
-                <a:spcPct val="110000"/>
-              </a:lnSpc>
-            </a:pPr>
-            <a:r>
-              <a:rPr sz="1250" b="0">
-                <a:solidFill>
-                  <a:srgbClr val="BDC1C6"/>
-                </a:solidFill>
-                <a:latin typeface="Arial"/>
-              </a:rPr>
-              <a:t>Managed database — automated backups + point-in-time restore.</a:t>
-            </a:r>
-          </a:p>
-        </p:txBody>
-      </p:sp>
-      <p:sp>
-        <p:nvSpPr>
-          <p:cNvPr id="26" name="Rectangle 25"/>
-          <p:cNvSpPr/>
-          <p:nvPr/>
-        </p:nvSpPr>
-        <p:spPr>
-          <a:xfrm>
-            <a:off x="8028431" y="3840480"/>
-            <a:ext cx="3520440" cy="1828800"/>
-          </a:xfrm>
-          <a:prstGeom prst="rect">
-            <a:avLst/>
-          </a:prstGeom>
-          <a:solidFill>
-            <a:srgbClr val="1D1D1D"/>
-          </a:solidFill>
-          <a:ln w="12700">
-            <a:solidFill>
-              <a:srgbClr val="3A3A3A"/>
-            </a:solidFill>
-          </a:ln>
-          <a:effectLst/>
-        </p:spPr>
-        <p:style>
-          <a:lnRef idx="1">
-            <a:schemeClr val="accent1"/>
-          </a:lnRef>
-          <a:fillRef idx="3">
-            <a:schemeClr val="accent1"/>
-          </a:fillRef>
-          <a:effectRef idx="2">
-            <a:schemeClr val="accent1"/>
-          </a:effectRef>
-          <a:fontRef idx="minor">
-            <a:schemeClr val="lt1"/>
-          </a:fontRef>
-        </p:style>
-        <p:txBody>
-          <a:bodyPr rtlCol="0" anchor="ctr"/>
-          <a:lstStyle/>
-          <a:p>
-            <a:pPr algn="ctr"/>
-          </a:p>
-        </p:txBody>
-      </p:sp>
-      <p:sp>
-        <p:nvSpPr>
-          <p:cNvPr id="27" name="Rectangle 26"/>
-          <p:cNvSpPr/>
-          <p:nvPr/>
-        </p:nvSpPr>
-        <p:spPr>
-          <a:xfrm>
-            <a:off x="8028431" y="3840480"/>
-            <a:ext cx="73152" cy="1828800"/>
+            <a:off x="7498079" y="1828800"/>
+            <a:ext cx="73152" cy="4206240"/>
           </a:xfrm>
           <a:prstGeom prst="rect">
             <a:avLst/>
@@ -6673,14 +6388,14 @@
       </p:sp>
       <p:sp>
         <p:nvSpPr>
-          <p:cNvPr id="28" name="TextBox 27"/>
+          <p:cNvPr id="9" name="TextBox 8"/>
           <p:cNvSpPr txBox="1"/>
           <p:nvPr/>
         </p:nvSpPr>
         <p:spPr>
           <a:xfrm>
-            <a:off x="8257031" y="4005072"/>
-            <a:ext cx="3154680" cy="457200"/>
+            <a:off x="7726679" y="1993392"/>
+            <a:ext cx="3749040" cy="457200"/>
           </a:xfrm>
           <a:prstGeom prst="rect">
             <a:avLst/>
@@ -6705,21 +6420,21 @@
                 </a:solidFill>
                 <a:latin typeface="Arial"/>
               </a:rPr>
-              <a:t>Integrations</a:t>
-            </a:r>
-          </a:p>
-        </p:txBody>
-      </p:sp>
-      <p:sp>
-        <p:nvSpPr>
-          <p:cNvPr id="29" name="TextBox 28"/>
+              <a:t>Why it matters</a:t>
+            </a:r>
+          </a:p>
+        </p:txBody>
+      </p:sp>
+      <p:sp>
+        <p:nvSpPr>
+          <p:cNvPr id="10" name="TextBox 9"/>
           <p:cNvSpPr txBox="1"/>
           <p:nvPr/>
         </p:nvSpPr>
         <p:spPr>
           <a:xfrm>
-            <a:off x="8257031" y="4498848"/>
-            <a:ext cx="3154680" cy="1051560"/>
+            <a:off x="7726679" y="2487168"/>
+            <a:ext cx="3749040" cy="3429000"/>
           </a:xfrm>
           <a:prstGeom prst="rect">
             <a:avLst/>
@@ -6744,46 +6459,7 @@
                 </a:solidFill>
                 <a:latin typeface="Arial"/>
               </a:rPr>
-              <a:t>Auto-publish to skintyee.ca, push notifications, write-only backups.</a:t>
-            </a:r>
-          </a:p>
-        </p:txBody>
-      </p:sp>
-      <p:sp>
-        <p:nvSpPr>
-          <p:cNvPr id="30" name="TextBox 29"/>
-          <p:cNvSpPr txBox="1"/>
-          <p:nvPr/>
-        </p:nvSpPr>
-        <p:spPr>
-          <a:xfrm>
-            <a:off x="640080" y="5989320"/>
-            <a:ext cx="10972800" cy="548640"/>
-          </a:xfrm>
-          <a:prstGeom prst="rect">
-            <a:avLst/>
-          </a:prstGeom>
-          <a:noFill/>
-        </p:spPr>
-        <p:txBody>
-          <a:bodyPr wrap="square" anchor="t">
-            <a:spAutoFit/>
-          </a:bodyPr>
-          <a:lstStyle/>
-          <a:p>
-            <a:pPr algn="l">
-              <a:lnSpc>
-                <a:spcPct val="100000"/>
-              </a:lnSpc>
-            </a:pPr>
-            <a:r>
-              <a:rPr sz="1250" b="0">
-                <a:solidFill>
-                  <a:srgbClr val="BDC1C6"/>
-                </a:solidFill>
-                <a:latin typeface="Arial"/>
-              </a:rPr>
-              <a:t>Azure-everywhere: matches the Nation's existing Microsoft footprint — Azure DNS, Outlook, Teams, Azure Storage.</a:t>
+              <a:t>Transparent band management builds trust. Members can see budgets vs. actual spending across housing, education, health and more — the same financial system staff already use, surfaced openly in the app.</a:t>
             </a:r>
           </a:p>
         </p:txBody>
@@ -6936,7 +6612,7 @@
                 </a:solidFill>
                 <a:latin typeface="Arial"/>
               </a:rPr>
-              <a:t>APPROACH</a:t>
+              <a:t>ARCHITECTURE</a:t>
             </a:r>
           </a:p>
         </p:txBody>
@@ -6975,205 +6651,21 @@
                 </a:solidFill>
                 <a:latin typeface="Arial"/>
               </a:rPr>
-              <a:t>Proof-of-concept first</a:t>
-            </a:r>
-          </a:p>
-        </p:txBody>
-      </p:sp>
-      <p:sp>
-        <p:nvSpPr>
-          <p:cNvPr id="6" name="TextBox 5"/>
-          <p:cNvSpPr txBox="1"/>
+              <a:t>Azure end-to-end</a:t>
+            </a:r>
+          </a:p>
+        </p:txBody>
+      </p:sp>
+      <p:sp>
+        <p:nvSpPr>
+          <p:cNvPr id="6" name="Rectangle 5"/>
+          <p:cNvSpPr/>
           <p:nvPr/>
         </p:nvSpPr>
         <p:spPr>
           <a:xfrm>
             <a:off x="640080" y="1828800"/>
-            <a:ext cx="6583680" cy="4114800"/>
-          </a:xfrm>
-          <a:prstGeom prst="rect">
-            <a:avLst/>
-          </a:prstGeom>
-          <a:noFill/>
-        </p:spPr>
-        <p:txBody>
-          <a:bodyPr wrap="square">
-            <a:spAutoFit/>
-          </a:bodyPr>
-          <a:lstStyle/>
-          <a:p>
-            <a:pPr>
-              <a:lnSpc>
-                <a:spcPct val="150000"/>
-              </a:lnSpc>
-            </a:pPr>
-            <a:r>
-              <a:rPr sz="1700" b="1">
-                <a:solidFill>
-                  <a:srgbClr val="00B8EC"/>
-                </a:solidFill>
-                <a:latin typeface="Arial"/>
-              </a:rPr>
-              <a:t>▸  </a:t>
-            </a:r>
-            <a:r>
-              <a:rPr sz="1700" b="1">
-                <a:solidFill>
-                  <a:srgbClr val="FFFFFF"/>
-                </a:solidFill>
-                <a:latin typeface="Arial"/>
-              </a:rPr>
-              <a:t>POC goal:  </a:t>
-            </a:r>
-            <a:r>
-              <a:rPr sz="1700">
-                <a:solidFill>
-                  <a:srgbClr val="BDC1C6"/>
-                </a:solidFill>
-                <a:latin typeface="Arial"/>
-              </a:rPr>
-              <a:t>demonstrate the full experience and every role's menu — now.</a:t>
-            </a:r>
-          </a:p>
-          <a:p>
-            <a:pPr>
-              <a:lnSpc>
-                <a:spcPct val="150000"/>
-              </a:lnSpc>
-            </a:pPr>
-            <a:r>
-              <a:rPr sz="1700" b="1">
-                <a:solidFill>
-                  <a:srgbClr val="00B8EC"/>
-                </a:solidFill>
-                <a:latin typeface="Arial"/>
-              </a:rPr>
-              <a:t>▸  </a:t>
-            </a:r>
-            <a:r>
-              <a:rPr sz="1700" b="1">
-                <a:solidFill>
-                  <a:srgbClr val="FFFFFF"/>
-                </a:solidFill>
-                <a:latin typeface="Arial"/>
-              </a:rPr>
-              <a:t>Mock data:  </a:t>
-            </a:r>
-            <a:r>
-              <a:rPr sz="1700">
-                <a:solidFill>
-                  <a:srgbClr val="BDC1C6"/>
-                </a:solidFill>
-                <a:latin typeface="Arial"/>
-              </a:rPr>
-              <a:t>all screens render realistic content behind a clean data seam.</a:t>
-            </a:r>
-          </a:p>
-          <a:p>
-            <a:pPr>
-              <a:lnSpc>
-                <a:spcPct val="150000"/>
-              </a:lnSpc>
-            </a:pPr>
-            <a:r>
-              <a:rPr sz="1700" b="1">
-                <a:solidFill>
-                  <a:srgbClr val="00B8EC"/>
-                </a:solidFill>
-                <a:latin typeface="Arial"/>
-              </a:rPr>
-              <a:t>▸  </a:t>
-            </a:r>
-            <a:r>
-              <a:rPr sz="1700" b="1">
-                <a:solidFill>
-                  <a:srgbClr val="FFFFFF"/>
-                </a:solidFill>
-                <a:latin typeface="Arial"/>
-              </a:rPr>
-              <a:t>Role switcher:  </a:t>
-            </a:r>
-            <a:r>
-              <a:rPr sz="1700">
-                <a:solidFill>
-                  <a:srgbClr val="BDC1C6"/>
-                </a:solidFill>
-                <a:latin typeface="Arial"/>
-              </a:rPr>
-              <a:t>preview Public / Member / Admin instantly, no login needed.</a:t>
-            </a:r>
-          </a:p>
-          <a:p>
-            <a:pPr>
-              <a:lnSpc>
-                <a:spcPct val="150000"/>
-              </a:lnSpc>
-            </a:pPr>
-            <a:r>
-              <a:rPr sz="1700" b="1">
-                <a:solidFill>
-                  <a:srgbClr val="00B8EC"/>
-                </a:solidFill>
-                <a:latin typeface="Arial"/>
-              </a:rPr>
-              <a:t>▸  </a:t>
-            </a:r>
-            <a:r>
-              <a:rPr sz="1700" b="1">
-                <a:solidFill>
-                  <a:srgbClr val="FFFFFF"/>
-                </a:solidFill>
-                <a:latin typeface="Arial"/>
-              </a:rPr>
-              <a:t>Real services later:  </a:t>
-            </a:r>
-            <a:r>
-              <a:rPr sz="1700">
-                <a:solidFill>
-                  <a:srgbClr val="BDC1C6"/>
-                </a:solidFill>
-                <a:latin typeface="Arial"/>
-              </a:rPr>
-              <a:t>swap mocks for the live API, Entra ID, and Azure Blob</a:t>
-            </a:r>
-          </a:p>
-          <a:p>
-            <a:pPr>
-              <a:lnSpc>
-                <a:spcPct val="150000"/>
-              </a:lnSpc>
-            </a:pPr>
-            <a:r>
-              <a:rPr sz="1700" b="1">
-                <a:solidFill>
-                  <a:srgbClr val="00B8EC"/>
-                </a:solidFill>
-                <a:latin typeface="Arial"/>
-              </a:rPr>
-              <a:t>▸  </a:t>
-            </a:r>
-            <a:r>
-              <a:rPr sz="1700">
-                <a:solidFill>
-                  <a:srgbClr val="BDC1C6"/>
-                </a:solidFill>
-                <a:latin typeface="Arial"/>
-              </a:rPr>
-              <a:t>with no rework of the screens — they only depend on the data contract.</a:t>
-            </a:r>
-          </a:p>
-        </p:txBody>
-      </p:sp>
-      <p:sp>
-        <p:nvSpPr>
-          <p:cNvPr id="7" name="Rectangle 6"/>
-          <p:cNvSpPr/>
-          <p:nvPr/>
-        </p:nvSpPr>
-        <p:spPr>
-          <a:xfrm>
-            <a:off x="7498079" y="1828800"/>
-            <a:ext cx="4114800" cy="4023360"/>
+            <a:ext cx="3520440" cy="1828800"/>
           </a:xfrm>
           <a:prstGeom prst="rect">
             <a:avLst/>
@@ -7212,14 +6704,854 @@
       </p:sp>
       <p:sp>
         <p:nvSpPr>
-          <p:cNvPr id="8" name="Rectangle 7"/>
+          <p:cNvPr id="7" name="Rectangle 6"/>
           <p:cNvSpPr/>
           <p:nvPr/>
         </p:nvSpPr>
         <p:spPr>
           <a:xfrm>
-            <a:off x="7498079" y="1828800"/>
-            <a:ext cx="73152" cy="4023360"/>
+            <a:off x="640080" y="1828800"/>
+            <a:ext cx="73152" cy="1828800"/>
+          </a:xfrm>
+          <a:prstGeom prst="rect">
+            <a:avLst/>
+          </a:prstGeom>
+          <a:solidFill>
+            <a:srgbClr val="00B8EC"/>
+          </a:solidFill>
+          <a:ln>
+            <a:noFill/>
+          </a:ln>
+          <a:effectLst/>
+        </p:spPr>
+        <p:style>
+          <a:lnRef idx="1">
+            <a:schemeClr val="accent1"/>
+          </a:lnRef>
+          <a:fillRef idx="3">
+            <a:schemeClr val="accent1"/>
+          </a:fillRef>
+          <a:effectRef idx="2">
+            <a:schemeClr val="accent1"/>
+          </a:effectRef>
+          <a:fontRef idx="minor">
+            <a:schemeClr val="lt1"/>
+          </a:fontRef>
+        </p:style>
+        <p:txBody>
+          <a:bodyPr rtlCol="0" anchor="ctr"/>
+          <a:lstStyle/>
+          <a:p>
+            <a:pPr algn="ctr"/>
+          </a:p>
+        </p:txBody>
+      </p:sp>
+      <p:sp>
+        <p:nvSpPr>
+          <p:cNvPr id="8" name="TextBox 7"/>
+          <p:cNvSpPr txBox="1"/>
+          <p:nvPr/>
+        </p:nvSpPr>
+        <p:spPr>
+          <a:xfrm>
+            <a:off x="868680" y="1993392"/>
+            <a:ext cx="3154680" cy="457200"/>
+          </a:xfrm>
+          <a:prstGeom prst="rect">
+            <a:avLst/>
+          </a:prstGeom>
+          <a:noFill/>
+        </p:spPr>
+        <p:txBody>
+          <a:bodyPr wrap="square" anchor="t">
+            <a:spAutoFit/>
+          </a:bodyPr>
+          <a:lstStyle/>
+          <a:p>
+            <a:pPr algn="l">
+              <a:lnSpc>
+                <a:spcPct val="100000"/>
+              </a:lnSpc>
+            </a:pPr>
+            <a:r>
+              <a:rPr sz="1600" b="1">
+                <a:solidFill>
+                  <a:srgbClr val="FFFFFF"/>
+                </a:solidFill>
+                <a:latin typeface="Arial"/>
+              </a:rPr>
+              <a:t>Skintyee App</a:t>
+            </a:r>
+          </a:p>
+        </p:txBody>
+      </p:sp>
+      <p:sp>
+        <p:nvSpPr>
+          <p:cNvPr id="9" name="TextBox 8"/>
+          <p:cNvSpPr txBox="1"/>
+          <p:nvPr/>
+        </p:nvSpPr>
+        <p:spPr>
+          <a:xfrm>
+            <a:off x="868680" y="2487168"/>
+            <a:ext cx="3154680" cy="1051560"/>
+          </a:xfrm>
+          <a:prstGeom prst="rect">
+            <a:avLst/>
+          </a:prstGeom>
+          <a:noFill/>
+        </p:spPr>
+        <p:txBody>
+          <a:bodyPr wrap="square" anchor="t">
+            <a:spAutoFit/>
+          </a:bodyPr>
+          <a:lstStyle/>
+          <a:p>
+            <a:pPr algn="l">
+              <a:lnSpc>
+                <a:spcPct val="110000"/>
+              </a:lnSpc>
+            </a:pPr>
+            <a:r>
+              <a:rPr sz="1250" b="0">
+                <a:solidFill>
+                  <a:srgbClr val="BDC1C6"/>
+                </a:solidFill>
+                <a:latin typeface="Arial"/>
+              </a:rPr>
+              <a:t>React Native + Expo. iOS, Android, and web from one codebase. Material UI, role-based menus.</a:t>
+            </a:r>
+          </a:p>
+        </p:txBody>
+      </p:sp>
+      <p:sp>
+        <p:nvSpPr>
+          <p:cNvPr id="10" name="Rectangle 9"/>
+          <p:cNvSpPr/>
+          <p:nvPr/>
+        </p:nvSpPr>
+        <p:spPr>
+          <a:xfrm>
+            <a:off x="4334256" y="1828800"/>
+            <a:ext cx="3520440" cy="1828800"/>
+          </a:xfrm>
+          <a:prstGeom prst="rect">
+            <a:avLst/>
+          </a:prstGeom>
+          <a:solidFill>
+            <a:srgbClr val="1D1D1D"/>
+          </a:solidFill>
+          <a:ln w="12700">
+            <a:solidFill>
+              <a:srgbClr val="3A3A3A"/>
+            </a:solidFill>
+          </a:ln>
+          <a:effectLst/>
+        </p:spPr>
+        <p:style>
+          <a:lnRef idx="1">
+            <a:schemeClr val="accent1"/>
+          </a:lnRef>
+          <a:fillRef idx="3">
+            <a:schemeClr val="accent1"/>
+          </a:fillRef>
+          <a:effectRef idx="2">
+            <a:schemeClr val="accent1"/>
+          </a:effectRef>
+          <a:fontRef idx="minor">
+            <a:schemeClr val="lt1"/>
+          </a:fontRef>
+        </p:style>
+        <p:txBody>
+          <a:bodyPr rtlCol="0" anchor="ctr"/>
+          <a:lstStyle/>
+          <a:p>
+            <a:pPr algn="ctr"/>
+          </a:p>
+        </p:txBody>
+      </p:sp>
+      <p:sp>
+        <p:nvSpPr>
+          <p:cNvPr id="11" name="Rectangle 10"/>
+          <p:cNvSpPr/>
+          <p:nvPr/>
+        </p:nvSpPr>
+        <p:spPr>
+          <a:xfrm>
+            <a:off x="4334256" y="1828800"/>
+            <a:ext cx="73152" cy="1828800"/>
+          </a:xfrm>
+          <a:prstGeom prst="rect">
+            <a:avLst/>
+          </a:prstGeom>
+          <a:solidFill>
+            <a:srgbClr val="EC6A37"/>
+          </a:solidFill>
+          <a:ln>
+            <a:noFill/>
+          </a:ln>
+          <a:effectLst/>
+        </p:spPr>
+        <p:style>
+          <a:lnRef idx="1">
+            <a:schemeClr val="accent1"/>
+          </a:lnRef>
+          <a:fillRef idx="3">
+            <a:schemeClr val="accent1"/>
+          </a:fillRef>
+          <a:effectRef idx="2">
+            <a:schemeClr val="accent1"/>
+          </a:effectRef>
+          <a:fontRef idx="minor">
+            <a:schemeClr val="lt1"/>
+          </a:fontRef>
+        </p:style>
+        <p:txBody>
+          <a:bodyPr rtlCol="0" anchor="ctr"/>
+          <a:lstStyle/>
+          <a:p>
+            <a:pPr algn="ctr"/>
+          </a:p>
+        </p:txBody>
+      </p:sp>
+      <p:sp>
+        <p:nvSpPr>
+          <p:cNvPr id="12" name="TextBox 11"/>
+          <p:cNvSpPr txBox="1"/>
+          <p:nvPr/>
+        </p:nvSpPr>
+        <p:spPr>
+          <a:xfrm>
+            <a:off x="4562856" y="1993392"/>
+            <a:ext cx="3154680" cy="457200"/>
+          </a:xfrm>
+          <a:prstGeom prst="rect">
+            <a:avLst/>
+          </a:prstGeom>
+          <a:noFill/>
+        </p:spPr>
+        <p:txBody>
+          <a:bodyPr wrap="square" anchor="t">
+            <a:spAutoFit/>
+          </a:bodyPr>
+          <a:lstStyle/>
+          <a:p>
+            <a:pPr algn="l">
+              <a:lnSpc>
+                <a:spcPct val="100000"/>
+              </a:lnSpc>
+            </a:pPr>
+            <a:r>
+              <a:rPr sz="1600" b="1">
+                <a:solidFill>
+                  <a:srgbClr val="FFFFFF"/>
+                </a:solidFill>
+                <a:latin typeface="Arial"/>
+              </a:rPr>
+              <a:t>Microsoft Entra ID</a:t>
+            </a:r>
+          </a:p>
+        </p:txBody>
+      </p:sp>
+      <p:sp>
+        <p:nvSpPr>
+          <p:cNvPr id="13" name="TextBox 12"/>
+          <p:cNvSpPr txBox="1"/>
+          <p:nvPr/>
+        </p:nvSpPr>
+        <p:spPr>
+          <a:xfrm>
+            <a:off x="4562856" y="2487168"/>
+            <a:ext cx="3154680" cy="1051560"/>
+          </a:xfrm>
+          <a:prstGeom prst="rect">
+            <a:avLst/>
+          </a:prstGeom>
+          <a:noFill/>
+        </p:spPr>
+        <p:txBody>
+          <a:bodyPr wrap="square" anchor="t">
+            <a:spAutoFit/>
+          </a:bodyPr>
+          <a:lstStyle/>
+          <a:p>
+            <a:pPr algn="l">
+              <a:lnSpc>
+                <a:spcPct val="110000"/>
+              </a:lnSpc>
+            </a:pPr>
+            <a:r>
+              <a:rPr sz="1250" b="0">
+                <a:solidFill>
+                  <a:srgbClr val="BDC1C6"/>
+                </a:solidFill>
+                <a:latin typeface="Arial"/>
+              </a:rPr>
+              <a:t>Identity &amp; sign-in (Azure AD). App roles map to Public / Member / Admin. Replaces AWS Cognito.</a:t>
+            </a:r>
+          </a:p>
+        </p:txBody>
+      </p:sp>
+      <p:sp>
+        <p:nvSpPr>
+          <p:cNvPr id="14" name="Rectangle 13"/>
+          <p:cNvSpPr/>
+          <p:nvPr/>
+        </p:nvSpPr>
+        <p:spPr>
+          <a:xfrm>
+            <a:off x="8028431" y="1828800"/>
+            <a:ext cx="3520440" cy="1828800"/>
+          </a:xfrm>
+          <a:prstGeom prst="rect">
+            <a:avLst/>
+          </a:prstGeom>
+          <a:solidFill>
+            <a:srgbClr val="1D1D1D"/>
+          </a:solidFill>
+          <a:ln w="12700">
+            <a:solidFill>
+              <a:srgbClr val="3A3A3A"/>
+            </a:solidFill>
+          </a:ln>
+          <a:effectLst/>
+        </p:spPr>
+        <p:style>
+          <a:lnRef idx="1">
+            <a:schemeClr val="accent1"/>
+          </a:lnRef>
+          <a:fillRef idx="3">
+            <a:schemeClr val="accent1"/>
+          </a:fillRef>
+          <a:effectRef idx="2">
+            <a:schemeClr val="accent1"/>
+          </a:effectRef>
+          <a:fontRef idx="minor">
+            <a:schemeClr val="lt1"/>
+          </a:fontRef>
+        </p:style>
+        <p:txBody>
+          <a:bodyPr rtlCol="0" anchor="ctr"/>
+          <a:lstStyle/>
+          <a:p>
+            <a:pPr algn="ctr"/>
+          </a:p>
+        </p:txBody>
+      </p:sp>
+      <p:sp>
+        <p:nvSpPr>
+          <p:cNvPr id="15" name="Rectangle 14"/>
+          <p:cNvSpPr/>
+          <p:nvPr/>
+        </p:nvSpPr>
+        <p:spPr>
+          <a:xfrm>
+            <a:off x="8028431" y="1828800"/>
+            <a:ext cx="73152" cy="1828800"/>
+          </a:xfrm>
+          <a:prstGeom prst="rect">
+            <a:avLst/>
+          </a:prstGeom>
+          <a:solidFill>
+            <a:srgbClr val="EC6A37"/>
+          </a:solidFill>
+          <a:ln>
+            <a:noFill/>
+          </a:ln>
+          <a:effectLst/>
+        </p:spPr>
+        <p:style>
+          <a:lnRef idx="1">
+            <a:schemeClr val="accent1"/>
+          </a:lnRef>
+          <a:fillRef idx="3">
+            <a:schemeClr val="accent1"/>
+          </a:fillRef>
+          <a:effectRef idx="2">
+            <a:schemeClr val="accent1"/>
+          </a:effectRef>
+          <a:fontRef idx="minor">
+            <a:schemeClr val="lt1"/>
+          </a:fontRef>
+        </p:style>
+        <p:txBody>
+          <a:bodyPr rtlCol="0" anchor="ctr"/>
+          <a:lstStyle/>
+          <a:p>
+            <a:pPr algn="ctr"/>
+          </a:p>
+        </p:txBody>
+      </p:sp>
+      <p:sp>
+        <p:nvSpPr>
+          <p:cNvPr id="16" name="TextBox 15"/>
+          <p:cNvSpPr txBox="1"/>
+          <p:nvPr/>
+        </p:nvSpPr>
+        <p:spPr>
+          <a:xfrm>
+            <a:off x="8257031" y="1993392"/>
+            <a:ext cx="3154680" cy="457200"/>
+          </a:xfrm>
+          <a:prstGeom prst="rect">
+            <a:avLst/>
+          </a:prstGeom>
+          <a:noFill/>
+        </p:spPr>
+        <p:txBody>
+          <a:bodyPr wrap="square" anchor="t">
+            <a:spAutoFit/>
+          </a:bodyPr>
+          <a:lstStyle/>
+          <a:p>
+            <a:pPr algn="l">
+              <a:lnSpc>
+                <a:spcPct val="100000"/>
+              </a:lnSpc>
+            </a:pPr>
+            <a:r>
+              <a:rPr sz="1600" b="1">
+                <a:solidFill>
+                  <a:srgbClr val="FFFFFF"/>
+                </a:solidFill>
+                <a:latin typeface="Arial"/>
+              </a:rPr>
+              <a:t>Azure Blob Storage</a:t>
+            </a:r>
+          </a:p>
+        </p:txBody>
+      </p:sp>
+      <p:sp>
+        <p:nvSpPr>
+          <p:cNvPr id="17" name="TextBox 16"/>
+          <p:cNvSpPr txBox="1"/>
+          <p:nvPr/>
+        </p:nvSpPr>
+        <p:spPr>
+          <a:xfrm>
+            <a:off x="8257031" y="2487168"/>
+            <a:ext cx="3154680" cy="1051560"/>
+          </a:xfrm>
+          <a:prstGeom prst="rect">
+            <a:avLst/>
+          </a:prstGeom>
+          <a:noFill/>
+        </p:spPr>
+        <p:txBody>
+          <a:bodyPr wrap="square" anchor="t">
+            <a:spAutoFit/>
+          </a:bodyPr>
+          <a:lstStyle/>
+          <a:p>
+            <a:pPr algn="l">
+              <a:lnSpc>
+                <a:spcPct val="110000"/>
+              </a:lnSpc>
+            </a:pPr>
+            <a:r>
+              <a:rPr sz="1250" b="0">
+                <a:solidFill>
+                  <a:srgbClr val="BDC1C6"/>
+                </a:solidFill>
+                <a:latin typeface="Arial"/>
+              </a:rPr>
+              <a:t>Documents &amp; media. Durable, backed-up. Replaces AWS S3.</a:t>
+            </a:r>
+          </a:p>
+        </p:txBody>
+      </p:sp>
+      <p:sp>
+        <p:nvSpPr>
+          <p:cNvPr id="18" name="Rectangle 17"/>
+          <p:cNvSpPr/>
+          <p:nvPr/>
+        </p:nvSpPr>
+        <p:spPr>
+          <a:xfrm>
+            <a:off x="640080" y="3840480"/>
+            <a:ext cx="3520440" cy="1828800"/>
+          </a:xfrm>
+          <a:prstGeom prst="rect">
+            <a:avLst/>
+          </a:prstGeom>
+          <a:solidFill>
+            <a:srgbClr val="1D1D1D"/>
+          </a:solidFill>
+          <a:ln w="12700">
+            <a:solidFill>
+              <a:srgbClr val="3A3A3A"/>
+            </a:solidFill>
+          </a:ln>
+          <a:effectLst/>
+        </p:spPr>
+        <p:style>
+          <a:lnRef idx="1">
+            <a:schemeClr val="accent1"/>
+          </a:lnRef>
+          <a:fillRef idx="3">
+            <a:schemeClr val="accent1"/>
+          </a:fillRef>
+          <a:effectRef idx="2">
+            <a:schemeClr val="accent1"/>
+          </a:effectRef>
+          <a:fontRef idx="minor">
+            <a:schemeClr val="lt1"/>
+          </a:fontRef>
+        </p:style>
+        <p:txBody>
+          <a:bodyPr rtlCol="0" anchor="ctr"/>
+          <a:lstStyle/>
+          <a:p>
+            <a:pPr algn="ctr"/>
+          </a:p>
+        </p:txBody>
+      </p:sp>
+      <p:sp>
+        <p:nvSpPr>
+          <p:cNvPr id="19" name="Rectangle 18"/>
+          <p:cNvSpPr/>
+          <p:nvPr/>
+        </p:nvSpPr>
+        <p:spPr>
+          <a:xfrm>
+            <a:off x="640080" y="3840480"/>
+            <a:ext cx="73152" cy="1828800"/>
+          </a:xfrm>
+          <a:prstGeom prst="rect">
+            <a:avLst/>
+          </a:prstGeom>
+          <a:solidFill>
+            <a:srgbClr val="00B8EC"/>
+          </a:solidFill>
+          <a:ln>
+            <a:noFill/>
+          </a:ln>
+          <a:effectLst/>
+        </p:spPr>
+        <p:style>
+          <a:lnRef idx="1">
+            <a:schemeClr val="accent1"/>
+          </a:lnRef>
+          <a:fillRef idx="3">
+            <a:schemeClr val="accent1"/>
+          </a:fillRef>
+          <a:effectRef idx="2">
+            <a:schemeClr val="accent1"/>
+          </a:effectRef>
+          <a:fontRef idx="minor">
+            <a:schemeClr val="lt1"/>
+          </a:fontRef>
+        </p:style>
+        <p:txBody>
+          <a:bodyPr rtlCol="0" anchor="ctr"/>
+          <a:lstStyle/>
+          <a:p>
+            <a:pPr algn="ctr"/>
+          </a:p>
+        </p:txBody>
+      </p:sp>
+      <p:sp>
+        <p:nvSpPr>
+          <p:cNvPr id="20" name="TextBox 19"/>
+          <p:cNvSpPr txBox="1"/>
+          <p:nvPr/>
+        </p:nvSpPr>
+        <p:spPr>
+          <a:xfrm>
+            <a:off x="868680" y="4005072"/>
+            <a:ext cx="3154680" cy="457200"/>
+          </a:xfrm>
+          <a:prstGeom prst="rect">
+            <a:avLst/>
+          </a:prstGeom>
+          <a:noFill/>
+        </p:spPr>
+        <p:txBody>
+          <a:bodyPr wrap="square" anchor="t">
+            <a:spAutoFit/>
+          </a:bodyPr>
+          <a:lstStyle/>
+          <a:p>
+            <a:pPr algn="l">
+              <a:lnSpc>
+                <a:spcPct val="100000"/>
+              </a:lnSpc>
+            </a:pPr>
+            <a:r>
+              <a:rPr sz="1600" b="1">
+                <a:solidFill>
+                  <a:srgbClr val="FFFFFF"/>
+                </a:solidFill>
+                <a:latin typeface="Arial"/>
+              </a:rPr>
+              <a:t>API Server</a:t>
+            </a:r>
+          </a:p>
+        </p:txBody>
+      </p:sp>
+      <p:sp>
+        <p:nvSpPr>
+          <p:cNvPr id="21" name="TextBox 20"/>
+          <p:cNvSpPr txBox="1"/>
+          <p:nvPr/>
+        </p:nvSpPr>
+        <p:spPr>
+          <a:xfrm>
+            <a:off x="868680" y="4498848"/>
+            <a:ext cx="3154680" cy="1051560"/>
+          </a:xfrm>
+          <a:prstGeom prst="rect">
+            <a:avLst/>
+          </a:prstGeom>
+          <a:noFill/>
+        </p:spPr>
+        <p:txBody>
+          <a:bodyPr wrap="square" anchor="t">
+            <a:spAutoFit/>
+          </a:bodyPr>
+          <a:lstStyle/>
+          <a:p>
+            <a:pPr algn="l">
+              <a:lnSpc>
+                <a:spcPct val="110000"/>
+              </a:lnSpc>
+            </a:pPr>
+            <a:r>
+              <a:rPr sz="1250" b="0">
+                <a:solidFill>
+                  <a:srgbClr val="BDC1C6"/>
+                </a:solidFill>
+                <a:latin typeface="Arial"/>
+              </a:rPr>
+              <a:t>App.SkinTyee.ca. Serves all app data; enforces role permissions.</a:t>
+            </a:r>
+          </a:p>
+        </p:txBody>
+      </p:sp>
+      <p:sp>
+        <p:nvSpPr>
+          <p:cNvPr id="22" name="Rectangle 21"/>
+          <p:cNvSpPr/>
+          <p:nvPr/>
+        </p:nvSpPr>
+        <p:spPr>
+          <a:xfrm>
+            <a:off x="4334256" y="3840480"/>
+            <a:ext cx="3520440" cy="1828800"/>
+          </a:xfrm>
+          <a:prstGeom prst="rect">
+            <a:avLst/>
+          </a:prstGeom>
+          <a:solidFill>
+            <a:srgbClr val="1D1D1D"/>
+          </a:solidFill>
+          <a:ln w="12700">
+            <a:solidFill>
+              <a:srgbClr val="3A3A3A"/>
+            </a:solidFill>
+          </a:ln>
+          <a:effectLst/>
+        </p:spPr>
+        <p:style>
+          <a:lnRef idx="1">
+            <a:schemeClr val="accent1"/>
+          </a:lnRef>
+          <a:fillRef idx="3">
+            <a:schemeClr val="accent1"/>
+          </a:fillRef>
+          <a:effectRef idx="2">
+            <a:schemeClr val="accent1"/>
+          </a:effectRef>
+          <a:fontRef idx="minor">
+            <a:schemeClr val="lt1"/>
+          </a:fontRef>
+        </p:style>
+        <p:txBody>
+          <a:bodyPr rtlCol="0" anchor="ctr"/>
+          <a:lstStyle/>
+          <a:p>
+            <a:pPr algn="ctr"/>
+          </a:p>
+        </p:txBody>
+      </p:sp>
+      <p:sp>
+        <p:nvSpPr>
+          <p:cNvPr id="23" name="Rectangle 22"/>
+          <p:cNvSpPr/>
+          <p:nvPr/>
+        </p:nvSpPr>
+        <p:spPr>
+          <a:xfrm>
+            <a:off x="4334256" y="3840480"/>
+            <a:ext cx="73152" cy="1828800"/>
+          </a:xfrm>
+          <a:prstGeom prst="rect">
+            <a:avLst/>
+          </a:prstGeom>
+          <a:solidFill>
+            <a:srgbClr val="00B8EC"/>
+          </a:solidFill>
+          <a:ln>
+            <a:noFill/>
+          </a:ln>
+          <a:effectLst/>
+        </p:spPr>
+        <p:style>
+          <a:lnRef idx="1">
+            <a:schemeClr val="accent1"/>
+          </a:lnRef>
+          <a:fillRef idx="3">
+            <a:schemeClr val="accent1"/>
+          </a:fillRef>
+          <a:effectRef idx="2">
+            <a:schemeClr val="accent1"/>
+          </a:effectRef>
+          <a:fontRef idx="minor">
+            <a:schemeClr val="lt1"/>
+          </a:fontRef>
+        </p:style>
+        <p:txBody>
+          <a:bodyPr rtlCol="0" anchor="ctr"/>
+          <a:lstStyle/>
+          <a:p>
+            <a:pPr algn="ctr"/>
+          </a:p>
+        </p:txBody>
+      </p:sp>
+      <p:sp>
+        <p:nvSpPr>
+          <p:cNvPr id="24" name="TextBox 23"/>
+          <p:cNvSpPr txBox="1"/>
+          <p:nvPr/>
+        </p:nvSpPr>
+        <p:spPr>
+          <a:xfrm>
+            <a:off x="4562856" y="4005072"/>
+            <a:ext cx="3154680" cy="457200"/>
+          </a:xfrm>
+          <a:prstGeom prst="rect">
+            <a:avLst/>
+          </a:prstGeom>
+          <a:noFill/>
+        </p:spPr>
+        <p:txBody>
+          <a:bodyPr wrap="square" anchor="t">
+            <a:spAutoFit/>
+          </a:bodyPr>
+          <a:lstStyle/>
+          <a:p>
+            <a:pPr algn="l">
+              <a:lnSpc>
+                <a:spcPct val="100000"/>
+              </a:lnSpc>
+            </a:pPr>
+            <a:r>
+              <a:rPr sz="1600" b="1">
+                <a:solidFill>
+                  <a:srgbClr val="FFFFFF"/>
+                </a:solidFill>
+                <a:latin typeface="Arial"/>
+              </a:rPr>
+              <a:t>Azure Cloud DB</a:t>
+            </a:r>
+          </a:p>
+        </p:txBody>
+      </p:sp>
+      <p:sp>
+        <p:nvSpPr>
+          <p:cNvPr id="25" name="TextBox 24"/>
+          <p:cNvSpPr txBox="1"/>
+          <p:nvPr/>
+        </p:nvSpPr>
+        <p:spPr>
+          <a:xfrm>
+            <a:off x="4562856" y="4498848"/>
+            <a:ext cx="3154680" cy="1051560"/>
+          </a:xfrm>
+          <a:prstGeom prst="rect">
+            <a:avLst/>
+          </a:prstGeom>
+          <a:noFill/>
+        </p:spPr>
+        <p:txBody>
+          <a:bodyPr wrap="square" anchor="t">
+            <a:spAutoFit/>
+          </a:bodyPr>
+          <a:lstStyle/>
+          <a:p>
+            <a:pPr algn="l">
+              <a:lnSpc>
+                <a:spcPct val="110000"/>
+              </a:lnSpc>
+            </a:pPr>
+            <a:r>
+              <a:rPr sz="1250" b="0">
+                <a:solidFill>
+                  <a:srgbClr val="BDC1C6"/>
+                </a:solidFill>
+                <a:latin typeface="Arial"/>
+              </a:rPr>
+              <a:t>Managed database — automated backups + point-in-time restore.</a:t>
+            </a:r>
+          </a:p>
+        </p:txBody>
+      </p:sp>
+      <p:sp>
+        <p:nvSpPr>
+          <p:cNvPr id="26" name="Rectangle 25"/>
+          <p:cNvSpPr/>
+          <p:nvPr/>
+        </p:nvSpPr>
+        <p:spPr>
+          <a:xfrm>
+            <a:off x="8028431" y="3840480"/>
+            <a:ext cx="3520440" cy="1828800"/>
+          </a:xfrm>
+          <a:prstGeom prst="rect">
+            <a:avLst/>
+          </a:prstGeom>
+          <a:solidFill>
+            <a:srgbClr val="1D1D1D"/>
+          </a:solidFill>
+          <a:ln w="12700">
+            <a:solidFill>
+              <a:srgbClr val="3A3A3A"/>
+            </a:solidFill>
+          </a:ln>
+          <a:effectLst/>
+        </p:spPr>
+        <p:style>
+          <a:lnRef idx="1">
+            <a:schemeClr val="accent1"/>
+          </a:lnRef>
+          <a:fillRef idx="3">
+            <a:schemeClr val="accent1"/>
+          </a:fillRef>
+          <a:effectRef idx="2">
+            <a:schemeClr val="accent1"/>
+          </a:effectRef>
+          <a:fontRef idx="minor">
+            <a:schemeClr val="lt1"/>
+          </a:fontRef>
+        </p:style>
+        <p:txBody>
+          <a:bodyPr rtlCol="0" anchor="ctr"/>
+          <a:lstStyle/>
+          <a:p>
+            <a:pPr algn="ctr"/>
+          </a:p>
+        </p:txBody>
+      </p:sp>
+      <p:sp>
+        <p:nvSpPr>
+          <p:cNvPr id="27" name="Rectangle 26"/>
+          <p:cNvSpPr/>
+          <p:nvPr/>
+        </p:nvSpPr>
+        <p:spPr>
+          <a:xfrm>
+            <a:off x="8028431" y="3840480"/>
+            <a:ext cx="73152" cy="1828800"/>
           </a:xfrm>
           <a:prstGeom prst="rect">
             <a:avLst/>
@@ -7256,14 +7588,14 @@
       </p:sp>
       <p:sp>
         <p:nvSpPr>
-          <p:cNvPr id="9" name="TextBox 8"/>
+          <p:cNvPr id="28" name="TextBox 27"/>
           <p:cNvSpPr txBox="1"/>
           <p:nvPr/>
         </p:nvSpPr>
         <p:spPr>
           <a:xfrm>
-            <a:off x="7726679" y="1993392"/>
-            <a:ext cx="3749040" cy="457200"/>
+            <a:off x="8257031" y="4005072"/>
+            <a:ext cx="3154680" cy="457200"/>
           </a:xfrm>
           <a:prstGeom prst="rect">
             <a:avLst/>
@@ -7288,21 +7620,21 @@
                 </a:solidFill>
                 <a:latin typeface="Arial"/>
               </a:rPr>
-              <a:t>De-risked delivery</a:t>
-            </a:r>
-          </a:p>
-        </p:txBody>
-      </p:sp>
-      <p:sp>
-        <p:nvSpPr>
-          <p:cNvPr id="10" name="TextBox 9"/>
+              <a:t>Integrations</a:t>
+            </a:r>
+          </a:p>
+        </p:txBody>
+      </p:sp>
+      <p:sp>
+        <p:nvSpPr>
+          <p:cNvPr id="29" name="TextBox 28"/>
           <p:cNvSpPr txBox="1"/>
           <p:nvPr/>
         </p:nvSpPr>
         <p:spPr>
           <a:xfrm>
-            <a:off x="7726679" y="2487168"/>
-            <a:ext cx="3749040" cy="3246120"/>
+            <a:off x="8257031" y="4498848"/>
+            <a:ext cx="3154680" cy="1051560"/>
           </a:xfrm>
           <a:prstGeom prst="rect">
             <a:avLst/>
@@ -7327,7 +7659,46 @@
                 </a:solidFill>
                 <a:latin typeface="Arial"/>
               </a:rPr>
-              <a:t>Decisions, look-and-feel, and scope are validated up front with a working demo — before investing in backend infrastructure. The POC IS the first phase of the build, not throwaway work.</a:t>
+              <a:t>Ferrus ASAP + Adagio / Sage 300 (finances); skintyee.ca WordPress (news &amp; notification categories); auto-publish; push.</a:t>
+            </a:r>
+          </a:p>
+        </p:txBody>
+      </p:sp>
+      <p:sp>
+        <p:nvSpPr>
+          <p:cNvPr id="30" name="TextBox 29"/>
+          <p:cNvSpPr txBox="1"/>
+          <p:nvPr/>
+        </p:nvSpPr>
+        <p:spPr>
+          <a:xfrm>
+            <a:off x="640080" y="5989320"/>
+            <a:ext cx="10972800" cy="548640"/>
+          </a:xfrm>
+          <a:prstGeom prst="rect">
+            <a:avLst/>
+          </a:prstGeom>
+          <a:noFill/>
+        </p:spPr>
+        <p:txBody>
+          <a:bodyPr wrap="square" anchor="t">
+            <a:spAutoFit/>
+          </a:bodyPr>
+          <a:lstStyle/>
+          <a:p>
+            <a:pPr algn="l">
+              <a:lnSpc>
+                <a:spcPct val="100000"/>
+              </a:lnSpc>
+            </a:pPr>
+            <a:r>
+              <a:rPr sz="1250" b="0">
+                <a:solidFill>
+                  <a:srgbClr val="BDC1C6"/>
+                </a:solidFill>
+                <a:latin typeface="Arial"/>
+              </a:rPr>
+              <a:t>Azure-everywhere: matches the Nation's existing Microsoft footprint — Azure DNS, Outlook, Teams, Azure Storage.</a:t>
             </a:r>
           </a:p>
         </p:txBody>
@@ -7480,7 +7851,7 @@
                 </a:solidFill>
                 <a:latin typeface="Arial"/>
               </a:rPr>
-              <a:t>ROADMAP</a:t>
+              <a:t>APPROACH</a:t>
             </a:r>
           </a:p>
         </p:txBody>
@@ -7519,21 +7890,205 @@
                 </a:solidFill>
                 <a:latin typeface="Arial"/>
               </a:rPr>
-              <a:t>3-month engagement</a:t>
-            </a:r>
-          </a:p>
-        </p:txBody>
-      </p:sp>
-      <p:sp>
-        <p:nvSpPr>
-          <p:cNvPr id="6" name="Rectangle 5"/>
+              <a:t>Proof-of-concept first</a:t>
+            </a:r>
+          </a:p>
+        </p:txBody>
+      </p:sp>
+      <p:sp>
+        <p:nvSpPr>
+          <p:cNvPr id="6" name="TextBox 5"/>
+          <p:cNvSpPr txBox="1"/>
+          <p:nvPr/>
+        </p:nvSpPr>
+        <p:spPr>
+          <a:xfrm>
+            <a:off x="640080" y="1828800"/>
+            <a:ext cx="6583680" cy="4114800"/>
+          </a:xfrm>
+          <a:prstGeom prst="rect">
+            <a:avLst/>
+          </a:prstGeom>
+          <a:noFill/>
+        </p:spPr>
+        <p:txBody>
+          <a:bodyPr wrap="square">
+            <a:spAutoFit/>
+          </a:bodyPr>
+          <a:lstStyle/>
+          <a:p>
+            <a:pPr>
+              <a:lnSpc>
+                <a:spcPct val="150000"/>
+              </a:lnSpc>
+            </a:pPr>
+            <a:r>
+              <a:rPr sz="1700" b="1">
+                <a:solidFill>
+                  <a:srgbClr val="00B8EC"/>
+                </a:solidFill>
+                <a:latin typeface="Arial"/>
+              </a:rPr>
+              <a:t>▸  </a:t>
+            </a:r>
+            <a:r>
+              <a:rPr sz="1700" b="1">
+                <a:solidFill>
+                  <a:srgbClr val="FFFFFF"/>
+                </a:solidFill>
+                <a:latin typeface="Arial"/>
+              </a:rPr>
+              <a:t>POC goal:  </a:t>
+            </a:r>
+            <a:r>
+              <a:rPr sz="1700">
+                <a:solidFill>
+                  <a:srgbClr val="BDC1C6"/>
+                </a:solidFill>
+                <a:latin typeface="Arial"/>
+              </a:rPr>
+              <a:t>demonstrate the full experience and every role's menu — now.</a:t>
+            </a:r>
+          </a:p>
+          <a:p>
+            <a:pPr>
+              <a:lnSpc>
+                <a:spcPct val="150000"/>
+              </a:lnSpc>
+            </a:pPr>
+            <a:r>
+              <a:rPr sz="1700" b="1">
+                <a:solidFill>
+                  <a:srgbClr val="00B8EC"/>
+                </a:solidFill>
+                <a:latin typeface="Arial"/>
+              </a:rPr>
+              <a:t>▸  </a:t>
+            </a:r>
+            <a:r>
+              <a:rPr sz="1700" b="1">
+                <a:solidFill>
+                  <a:srgbClr val="FFFFFF"/>
+                </a:solidFill>
+                <a:latin typeface="Arial"/>
+              </a:rPr>
+              <a:t>Mock data:  </a:t>
+            </a:r>
+            <a:r>
+              <a:rPr sz="1700">
+                <a:solidFill>
+                  <a:srgbClr val="BDC1C6"/>
+                </a:solidFill>
+                <a:latin typeface="Arial"/>
+              </a:rPr>
+              <a:t>all screens render realistic content behind a clean data seam.</a:t>
+            </a:r>
+          </a:p>
+          <a:p>
+            <a:pPr>
+              <a:lnSpc>
+                <a:spcPct val="150000"/>
+              </a:lnSpc>
+            </a:pPr>
+            <a:r>
+              <a:rPr sz="1700" b="1">
+                <a:solidFill>
+                  <a:srgbClr val="00B8EC"/>
+                </a:solidFill>
+                <a:latin typeface="Arial"/>
+              </a:rPr>
+              <a:t>▸  </a:t>
+            </a:r>
+            <a:r>
+              <a:rPr sz="1700" b="1">
+                <a:solidFill>
+                  <a:srgbClr val="FFFFFF"/>
+                </a:solidFill>
+                <a:latin typeface="Arial"/>
+              </a:rPr>
+              <a:t>Role switcher:  </a:t>
+            </a:r>
+            <a:r>
+              <a:rPr sz="1700">
+                <a:solidFill>
+                  <a:srgbClr val="BDC1C6"/>
+                </a:solidFill>
+                <a:latin typeface="Arial"/>
+              </a:rPr>
+              <a:t>preview Public / Member / Admin instantly, no login needed.</a:t>
+            </a:r>
+          </a:p>
+          <a:p>
+            <a:pPr>
+              <a:lnSpc>
+                <a:spcPct val="150000"/>
+              </a:lnSpc>
+            </a:pPr>
+            <a:r>
+              <a:rPr sz="1700" b="1">
+                <a:solidFill>
+                  <a:srgbClr val="00B8EC"/>
+                </a:solidFill>
+                <a:latin typeface="Arial"/>
+              </a:rPr>
+              <a:t>▸  </a:t>
+            </a:r>
+            <a:r>
+              <a:rPr sz="1700" b="1">
+                <a:solidFill>
+                  <a:srgbClr val="FFFFFF"/>
+                </a:solidFill>
+                <a:latin typeface="Arial"/>
+              </a:rPr>
+              <a:t>Real services later:  </a:t>
+            </a:r>
+            <a:r>
+              <a:rPr sz="1700">
+                <a:solidFill>
+                  <a:srgbClr val="BDC1C6"/>
+                </a:solidFill>
+                <a:latin typeface="Arial"/>
+              </a:rPr>
+              <a:t>swap mocks for the live API, Entra ID, and Azure Blob</a:t>
+            </a:r>
+          </a:p>
+          <a:p>
+            <a:pPr>
+              <a:lnSpc>
+                <a:spcPct val="150000"/>
+              </a:lnSpc>
+            </a:pPr>
+            <a:r>
+              <a:rPr sz="1700" b="1">
+                <a:solidFill>
+                  <a:srgbClr val="00B8EC"/>
+                </a:solidFill>
+                <a:latin typeface="Arial"/>
+              </a:rPr>
+              <a:t>▸  </a:t>
+            </a:r>
+            <a:r>
+              <a:rPr sz="1700">
+                <a:solidFill>
+                  <a:srgbClr val="BDC1C6"/>
+                </a:solidFill>
+                <a:latin typeface="Arial"/>
+              </a:rPr>
+              <a:t>with no rework of the screens — they only depend on the data contract.</a:t>
+            </a:r>
+          </a:p>
+        </p:txBody>
+      </p:sp>
+      <p:sp>
+        <p:nvSpPr>
+          <p:cNvPr id="7" name="Rectangle 6"/>
           <p:cNvSpPr/>
           <p:nvPr/>
         </p:nvSpPr>
         <p:spPr>
           <a:xfrm>
-            <a:off x="640080" y="1920240"/>
-            <a:ext cx="10911535" cy="1325880"/>
+            <a:off x="7498079" y="1828800"/>
+            <a:ext cx="4114800" cy="4023360"/>
           </a:xfrm>
           <a:prstGeom prst="rect">
             <a:avLst/>
@@ -7572,428 +8127,14 @@
       </p:sp>
       <p:sp>
         <p:nvSpPr>
-          <p:cNvPr id="7" name="Rectangle 6"/>
+          <p:cNvPr id="8" name="Rectangle 7"/>
           <p:cNvSpPr/>
           <p:nvPr/>
         </p:nvSpPr>
         <p:spPr>
           <a:xfrm>
-            <a:off x="640080" y="1920240"/>
-            <a:ext cx="91440" cy="1325880"/>
-          </a:xfrm>
-          <a:prstGeom prst="rect">
-            <a:avLst/>
-          </a:prstGeom>
-          <a:solidFill>
-            <a:srgbClr val="00B8EC"/>
-          </a:solidFill>
-          <a:ln>
-            <a:noFill/>
-          </a:ln>
-          <a:effectLst/>
-        </p:spPr>
-        <p:style>
-          <a:lnRef idx="1">
-            <a:schemeClr val="accent1"/>
-          </a:lnRef>
-          <a:fillRef idx="3">
-            <a:schemeClr val="accent1"/>
-          </a:fillRef>
-          <a:effectRef idx="2">
-            <a:schemeClr val="accent1"/>
-          </a:effectRef>
-          <a:fontRef idx="minor">
-            <a:schemeClr val="lt1"/>
-          </a:fontRef>
-        </p:style>
-        <p:txBody>
-          <a:bodyPr rtlCol="0" anchor="ctr"/>
-          <a:lstStyle/>
-          <a:p>
-            <a:pPr algn="ctr"/>
-          </a:p>
-        </p:txBody>
-      </p:sp>
-      <p:sp>
-        <p:nvSpPr>
-          <p:cNvPr id="8" name="TextBox 7"/>
-          <p:cNvSpPr txBox="1"/>
-          <p:nvPr/>
-        </p:nvSpPr>
-        <p:spPr>
-          <a:xfrm>
-            <a:off x="914400" y="2066544"/>
-            <a:ext cx="7772400" cy="457200"/>
-          </a:xfrm>
-          <a:prstGeom prst="rect">
-            <a:avLst/>
-          </a:prstGeom>
-          <a:noFill/>
-        </p:spPr>
-        <p:txBody>
-          <a:bodyPr wrap="square" anchor="t">
-            <a:spAutoFit/>
-          </a:bodyPr>
-          <a:lstStyle/>
-          <a:p>
-            <a:pPr algn="l">
-              <a:lnSpc>
-                <a:spcPct val="100000"/>
-              </a:lnSpc>
-            </a:pPr>
-            <a:r>
-              <a:rPr sz="1800" b="1">
-                <a:solidFill>
-                  <a:srgbClr val="FFFFFF"/>
-                </a:solidFill>
-                <a:latin typeface="Arial"/>
-              </a:rPr>
-              <a:t>Phase 1 · POC</a:t>
-            </a:r>
-          </a:p>
-        </p:txBody>
-      </p:sp>
-      <p:sp>
-        <p:nvSpPr>
-          <p:cNvPr id="9" name="TextBox 8"/>
-          <p:cNvSpPr txBox="1"/>
-          <p:nvPr/>
-        </p:nvSpPr>
-        <p:spPr>
-          <a:xfrm>
-            <a:off x="914400" y="2578608"/>
-            <a:ext cx="8686800" cy="548640"/>
-          </a:xfrm>
-          <a:prstGeom prst="rect">
-            <a:avLst/>
-          </a:prstGeom>
-          <a:noFill/>
-        </p:spPr>
-        <p:txBody>
-          <a:bodyPr wrap="square" anchor="t">
-            <a:spAutoFit/>
-          </a:bodyPr>
-          <a:lstStyle/>
-          <a:p>
-            <a:pPr algn="l">
-              <a:lnSpc>
-                <a:spcPct val="100000"/>
-              </a:lnSpc>
-            </a:pPr>
-            <a:r>
-              <a:rPr sz="1300" b="0">
-                <a:solidFill>
-                  <a:srgbClr val="BDC1C6"/>
-                </a:solidFill>
-                <a:latin typeface="Arial"/>
-              </a:rPr>
-              <a:t>RN app, theme &amp; stack, all 7 features with role gating, mock data, demo-ready.</a:t>
-            </a:r>
-          </a:p>
-        </p:txBody>
-      </p:sp>
-      <p:sp>
-        <p:nvSpPr>
-          <p:cNvPr id="10" name="TextBox 9"/>
-          <p:cNvSpPr txBox="1"/>
-          <p:nvPr/>
-        </p:nvSpPr>
-        <p:spPr>
-          <a:xfrm>
-            <a:off x="9144000" y="2331720"/>
-            <a:ext cx="2377440" cy="548640"/>
-          </a:xfrm>
-          <a:prstGeom prst="rect">
-            <a:avLst/>
-          </a:prstGeom>
-          <a:noFill/>
-        </p:spPr>
-        <p:txBody>
-          <a:bodyPr wrap="square" anchor="t">
-            <a:spAutoFit/>
-          </a:bodyPr>
-          <a:lstStyle/>
-          <a:p>
-            <a:pPr algn="r">
-              <a:lnSpc>
-                <a:spcPct val="100000"/>
-              </a:lnSpc>
-            </a:pPr>
-            <a:r>
-              <a:rPr sz="1400" b="1">
-                <a:solidFill>
-                  <a:srgbClr val="00B8EC"/>
-                </a:solidFill>
-                <a:latin typeface="Arial"/>
-              </a:rPr>
-              <a:t>May – mid-June</a:t>
-            </a:r>
-          </a:p>
-        </p:txBody>
-      </p:sp>
-      <p:sp>
-        <p:nvSpPr>
-          <p:cNvPr id="11" name="Rectangle 10"/>
-          <p:cNvSpPr/>
-          <p:nvPr/>
-        </p:nvSpPr>
-        <p:spPr>
-          <a:xfrm>
-            <a:off x="640080" y="3429000"/>
-            <a:ext cx="10911535" cy="1325880"/>
-          </a:xfrm>
-          <a:prstGeom prst="rect">
-            <a:avLst/>
-          </a:prstGeom>
-          <a:solidFill>
-            <a:srgbClr val="1D1D1D"/>
-          </a:solidFill>
-          <a:ln w="12700">
-            <a:solidFill>
-              <a:srgbClr val="3A3A3A"/>
-            </a:solidFill>
-          </a:ln>
-          <a:effectLst/>
-        </p:spPr>
-        <p:style>
-          <a:lnRef idx="1">
-            <a:schemeClr val="accent1"/>
-          </a:lnRef>
-          <a:fillRef idx="3">
-            <a:schemeClr val="accent1"/>
-          </a:fillRef>
-          <a:effectRef idx="2">
-            <a:schemeClr val="accent1"/>
-          </a:effectRef>
-          <a:fontRef idx="minor">
-            <a:schemeClr val="lt1"/>
-          </a:fontRef>
-        </p:style>
-        <p:txBody>
-          <a:bodyPr rtlCol="0" anchor="ctr"/>
-          <a:lstStyle/>
-          <a:p>
-            <a:pPr algn="ctr"/>
-          </a:p>
-        </p:txBody>
-      </p:sp>
-      <p:sp>
-        <p:nvSpPr>
-          <p:cNvPr id="12" name="Rectangle 11"/>
-          <p:cNvSpPr/>
-          <p:nvPr/>
-        </p:nvSpPr>
-        <p:spPr>
-          <a:xfrm>
-            <a:off x="640080" y="3429000"/>
-            <a:ext cx="91440" cy="1325880"/>
-          </a:xfrm>
-          <a:prstGeom prst="rect">
-            <a:avLst/>
-          </a:prstGeom>
-          <a:solidFill>
-            <a:srgbClr val="EC6A37"/>
-          </a:solidFill>
-          <a:ln>
-            <a:noFill/>
-          </a:ln>
-          <a:effectLst/>
-        </p:spPr>
-        <p:style>
-          <a:lnRef idx="1">
-            <a:schemeClr val="accent1"/>
-          </a:lnRef>
-          <a:fillRef idx="3">
-            <a:schemeClr val="accent1"/>
-          </a:fillRef>
-          <a:effectRef idx="2">
-            <a:schemeClr val="accent1"/>
-          </a:effectRef>
-          <a:fontRef idx="minor">
-            <a:schemeClr val="lt1"/>
-          </a:fontRef>
-        </p:style>
-        <p:txBody>
-          <a:bodyPr rtlCol="0" anchor="ctr"/>
-          <a:lstStyle/>
-          <a:p>
-            <a:pPr algn="ctr"/>
-          </a:p>
-        </p:txBody>
-      </p:sp>
-      <p:sp>
-        <p:nvSpPr>
-          <p:cNvPr id="13" name="TextBox 12"/>
-          <p:cNvSpPr txBox="1"/>
-          <p:nvPr/>
-        </p:nvSpPr>
-        <p:spPr>
-          <a:xfrm>
-            <a:off x="914400" y="3575304"/>
-            <a:ext cx="7772400" cy="457200"/>
-          </a:xfrm>
-          <a:prstGeom prst="rect">
-            <a:avLst/>
-          </a:prstGeom>
-          <a:noFill/>
-        </p:spPr>
-        <p:txBody>
-          <a:bodyPr wrap="square" anchor="t">
-            <a:spAutoFit/>
-          </a:bodyPr>
-          <a:lstStyle/>
-          <a:p>
-            <a:pPr algn="l">
-              <a:lnSpc>
-                <a:spcPct val="100000"/>
-              </a:lnSpc>
-            </a:pPr>
-            <a:r>
-              <a:rPr sz="1800" b="1">
-                <a:solidFill>
-                  <a:srgbClr val="FFFFFF"/>
-                </a:solidFill>
-                <a:latin typeface="Arial"/>
-              </a:rPr>
-              <a:t>Phase 2 · Backend &amp; Identity</a:t>
-            </a:r>
-          </a:p>
-        </p:txBody>
-      </p:sp>
-      <p:sp>
-        <p:nvSpPr>
-          <p:cNvPr id="14" name="TextBox 13"/>
-          <p:cNvSpPr txBox="1"/>
-          <p:nvPr/>
-        </p:nvSpPr>
-        <p:spPr>
-          <a:xfrm>
-            <a:off x="914400" y="4087368"/>
-            <a:ext cx="8686800" cy="548640"/>
-          </a:xfrm>
-          <a:prstGeom prst="rect">
-            <a:avLst/>
-          </a:prstGeom>
-          <a:noFill/>
-        </p:spPr>
-        <p:txBody>
-          <a:bodyPr wrap="square" anchor="t">
-            <a:spAutoFit/>
-          </a:bodyPr>
-          <a:lstStyle/>
-          <a:p>
-            <a:pPr algn="l">
-              <a:lnSpc>
-                <a:spcPct val="100000"/>
-              </a:lnSpc>
-            </a:pPr>
-            <a:r>
-              <a:rPr sz="1300" b="0">
-                <a:solidFill>
-                  <a:srgbClr val="BDC1C6"/>
-                </a:solidFill>
-                <a:latin typeface="Arial"/>
-              </a:rPr>
-              <a:t>API Server + Azure Cloud DB live; Microsoft Entra ID sign-in; retire mocks.</a:t>
-            </a:r>
-          </a:p>
-        </p:txBody>
-      </p:sp>
-      <p:sp>
-        <p:nvSpPr>
-          <p:cNvPr id="15" name="TextBox 14"/>
-          <p:cNvSpPr txBox="1"/>
-          <p:nvPr/>
-        </p:nvSpPr>
-        <p:spPr>
-          <a:xfrm>
-            <a:off x="9144000" y="3840480"/>
-            <a:ext cx="2377440" cy="548640"/>
-          </a:xfrm>
-          <a:prstGeom prst="rect">
-            <a:avLst/>
-          </a:prstGeom>
-          <a:noFill/>
-        </p:spPr>
-        <p:txBody>
-          <a:bodyPr wrap="square" anchor="t">
-            <a:spAutoFit/>
-          </a:bodyPr>
-          <a:lstStyle/>
-          <a:p>
-            <a:pPr algn="r">
-              <a:lnSpc>
-                <a:spcPct val="100000"/>
-              </a:lnSpc>
-            </a:pPr>
-            <a:r>
-              <a:rPr sz="1400" b="1">
-                <a:solidFill>
-                  <a:srgbClr val="EC6A37"/>
-                </a:solidFill>
-                <a:latin typeface="Arial"/>
-              </a:rPr>
-              <a:t>mid-June – mid-July</a:t>
-            </a:r>
-          </a:p>
-        </p:txBody>
-      </p:sp>
-      <p:sp>
-        <p:nvSpPr>
-          <p:cNvPr id="16" name="Rectangle 15"/>
-          <p:cNvSpPr/>
-          <p:nvPr/>
-        </p:nvSpPr>
-        <p:spPr>
-          <a:xfrm>
-            <a:off x="640080" y="4937760"/>
-            <a:ext cx="10911535" cy="1325880"/>
-          </a:xfrm>
-          <a:prstGeom prst="rect">
-            <a:avLst/>
-          </a:prstGeom>
-          <a:solidFill>
-            <a:srgbClr val="1D1D1D"/>
-          </a:solidFill>
-          <a:ln w="12700">
-            <a:solidFill>
-              <a:srgbClr val="3A3A3A"/>
-            </a:solidFill>
-          </a:ln>
-          <a:effectLst/>
-        </p:spPr>
-        <p:style>
-          <a:lnRef idx="1">
-            <a:schemeClr val="accent1"/>
-          </a:lnRef>
-          <a:fillRef idx="3">
-            <a:schemeClr val="accent1"/>
-          </a:fillRef>
-          <a:effectRef idx="2">
-            <a:schemeClr val="accent1"/>
-          </a:effectRef>
-          <a:fontRef idx="minor">
-            <a:schemeClr val="lt1"/>
-          </a:fontRef>
-        </p:style>
-        <p:txBody>
-          <a:bodyPr rtlCol="0" anchor="ctr"/>
-          <a:lstStyle/>
-          <a:p>
-            <a:pPr algn="ctr"/>
-          </a:p>
-        </p:txBody>
-      </p:sp>
-      <p:sp>
-        <p:nvSpPr>
-          <p:cNvPr id="17" name="Rectangle 16"/>
-          <p:cNvSpPr/>
-          <p:nvPr/>
-        </p:nvSpPr>
-        <p:spPr>
-          <a:xfrm>
-            <a:off x="640080" y="4937760"/>
-            <a:ext cx="91440" cy="1325880"/>
+            <a:off x="7498079" y="1828800"/>
+            <a:ext cx="73152" cy="4023360"/>
           </a:xfrm>
           <a:prstGeom prst="rect">
             <a:avLst/>
@@ -8030,14 +8171,14 @@
       </p:sp>
       <p:sp>
         <p:nvSpPr>
-          <p:cNvPr id="18" name="TextBox 17"/>
+          <p:cNvPr id="9" name="TextBox 8"/>
           <p:cNvSpPr txBox="1"/>
           <p:nvPr/>
         </p:nvSpPr>
         <p:spPr>
           <a:xfrm>
-            <a:off x="914400" y="5084064"/>
-            <a:ext cx="7772400" cy="457200"/>
+            <a:off x="7726679" y="1993392"/>
+            <a:ext cx="3749040" cy="457200"/>
           </a:xfrm>
           <a:prstGeom prst="rect">
             <a:avLst/>
@@ -8056,27 +8197,27 @@
               </a:lnSpc>
             </a:pPr>
             <a:r>
-              <a:rPr sz="1800" b="1">
+              <a:rPr sz="1600" b="1">
                 <a:solidFill>
                   <a:srgbClr val="FFFFFF"/>
                 </a:solidFill>
                 <a:latin typeface="Arial"/>
               </a:rPr>
-              <a:t>Phase 3 · Storage, Integrations &amp; Hardening</a:t>
-            </a:r>
-          </a:p>
-        </p:txBody>
-      </p:sp>
-      <p:sp>
-        <p:nvSpPr>
-          <p:cNvPr id="19" name="TextBox 18"/>
+              <a:t>De-risked delivery</a:t>
+            </a:r>
+          </a:p>
+        </p:txBody>
+      </p:sp>
+      <p:sp>
+        <p:nvSpPr>
+          <p:cNvPr id="10" name="TextBox 9"/>
           <p:cNvSpPr txBox="1"/>
           <p:nvPr/>
         </p:nvSpPr>
         <p:spPr>
           <a:xfrm>
-            <a:off x="914400" y="5596128"/>
-            <a:ext cx="8686800" cy="548640"/>
+            <a:off x="7726679" y="2487168"/>
+            <a:ext cx="3749040" cy="3246120"/>
           </a:xfrm>
           <a:prstGeom prst="rect">
             <a:avLst/>
@@ -8091,56 +8232,17 @@
           <a:p>
             <a:pPr algn="l">
               <a:lnSpc>
-                <a:spcPct val="100000"/>
+                <a:spcPct val="110000"/>
               </a:lnSpc>
             </a:pPr>
             <a:r>
-              <a:rPr sz="1300" b="0">
+              <a:rPr sz="1250" b="0">
                 <a:solidFill>
                   <a:srgbClr val="BDC1C6"/>
                 </a:solidFill>
                 <a:latin typeface="Arial"/>
               </a:rPr>
-              <a:t>Azure Blob Storage, push, auto-publish, branding, testing, native builds, UAT.</a:t>
-            </a:r>
-          </a:p>
-        </p:txBody>
-      </p:sp>
-      <p:sp>
-        <p:nvSpPr>
-          <p:cNvPr id="20" name="TextBox 19"/>
-          <p:cNvSpPr txBox="1"/>
-          <p:nvPr/>
-        </p:nvSpPr>
-        <p:spPr>
-          <a:xfrm>
-            <a:off x="9144000" y="5349240"/>
-            <a:ext cx="2377440" cy="548640"/>
-          </a:xfrm>
-          <a:prstGeom prst="rect">
-            <a:avLst/>
-          </a:prstGeom>
-          <a:noFill/>
-        </p:spPr>
-        <p:txBody>
-          <a:bodyPr wrap="square" anchor="t">
-            <a:spAutoFit/>
-          </a:bodyPr>
-          <a:lstStyle/>
-          <a:p>
-            <a:pPr algn="r">
-              <a:lnSpc>
-                <a:spcPct val="100000"/>
-              </a:lnSpc>
-            </a:pPr>
-            <a:r>
-              <a:rPr sz="1400" b="1">
-                <a:solidFill>
-                  <a:srgbClr val="9ECD3B"/>
-                </a:solidFill>
-                <a:latin typeface="Arial"/>
-              </a:rPr>
-              <a:t>mid-July – end Aug</a:t>
+              <a:t>Decisions, look-and-feel, and scope are validated up front with a working demo — before investing in backend infrastructure. The POC IS the first phase of the build, not throwaway work.</a:t>
             </a:r>
           </a:p>
         </p:txBody>
@@ -8293,7 +8395,7 @@
                 </a:solidFill>
                 <a:latin typeface="Arial"/>
               </a:rPr>
-              <a:t>QUALITY</a:t>
+              <a:t>ROADMAP</a:t>
             </a:r>
           </a:p>
         </p:txBody>
@@ -8332,7 +8434,7 @@
                 </a:solidFill>
                 <a:latin typeface="Arial"/>
               </a:rPr>
-              <a:t>Testing &amp; distribution</a:t>
+              <a:t>3-month engagement</a:t>
             </a:r>
           </a:p>
         </p:txBody>
@@ -8345,8 +8447,8 @@
         </p:nvSpPr>
         <p:spPr>
           <a:xfrm>
-            <a:off x="640080" y="1828800"/>
-            <a:ext cx="3520440" cy="1920240"/>
+            <a:off x="640080" y="1920240"/>
+            <a:ext cx="10911535" cy="1325880"/>
           </a:xfrm>
           <a:prstGeom prst="rect">
             <a:avLst/>
@@ -8391,8 +8493,8 @@
         </p:nvSpPr>
         <p:spPr>
           <a:xfrm>
-            <a:off x="640080" y="1828800"/>
-            <a:ext cx="73152" cy="1920240"/>
+            <a:off x="640080" y="1920240"/>
+            <a:ext cx="91440" cy="1325880"/>
           </a:xfrm>
           <a:prstGeom prst="rect">
             <a:avLst/>
@@ -8435,8 +8537,8 @@
         </p:nvSpPr>
         <p:spPr>
           <a:xfrm>
-            <a:off x="868680" y="1993392"/>
-            <a:ext cx="3154680" cy="457200"/>
+            <a:off x="914400" y="2066544"/>
+            <a:ext cx="7772400" cy="457200"/>
           </a:xfrm>
           <a:prstGeom prst="rect">
             <a:avLst/>
@@ -8455,13 +8557,13 @@
               </a:lnSpc>
             </a:pPr>
             <a:r>
-              <a:rPr sz="1600" b="1">
+              <a:rPr sz="1800" b="1">
                 <a:solidFill>
                   <a:srgbClr val="FFFFFF"/>
                 </a:solidFill>
                 <a:latin typeface="Arial"/>
               </a:rPr>
-              <a:t>Unit &amp; integration</a:t>
+              <a:t>Phase 1 · POC</a:t>
             </a:r>
           </a:p>
         </p:txBody>
@@ -8474,8 +8576,8 @@
         </p:nvSpPr>
         <p:spPr>
           <a:xfrm>
-            <a:off x="868680" y="2487168"/>
-            <a:ext cx="3154680" cy="1143000"/>
+            <a:off x="914400" y="2578608"/>
+            <a:ext cx="8686800" cy="548640"/>
           </a:xfrm>
           <a:prstGeom prst="rect">
             <a:avLst/>
@@ -8490,31 +8592,70 @@
           <a:p>
             <a:pPr algn="l">
               <a:lnSpc>
-                <a:spcPct val="110000"/>
+                <a:spcPct val="100000"/>
               </a:lnSpc>
             </a:pPr>
             <a:r>
-              <a:rPr sz="1250" b="0">
+              <a:rPr sz="1300" b="0">
                 <a:solidFill>
                   <a:srgbClr val="BDC1C6"/>
                 </a:solidFill>
                 <a:latin typeface="Arial"/>
               </a:rPr>
-              <a:t>Jest tests for the store, thunks, and mock API; React Native Testing Library for screens and role gating.</a:t>
-            </a:r>
-          </a:p>
-        </p:txBody>
-      </p:sp>
-      <p:sp>
-        <p:nvSpPr>
-          <p:cNvPr id="10" name="Rectangle 9"/>
+              <a:t>RN app, theme &amp; stack, all 7 features with role gating, mock data, demo-ready.</a:t>
+            </a:r>
+          </a:p>
+        </p:txBody>
+      </p:sp>
+      <p:sp>
+        <p:nvSpPr>
+          <p:cNvPr id="10" name="TextBox 9"/>
+          <p:cNvSpPr txBox="1"/>
+          <p:nvPr/>
+        </p:nvSpPr>
+        <p:spPr>
+          <a:xfrm>
+            <a:off x="9144000" y="2331720"/>
+            <a:ext cx="2377440" cy="548640"/>
+          </a:xfrm>
+          <a:prstGeom prst="rect">
+            <a:avLst/>
+          </a:prstGeom>
+          <a:noFill/>
+        </p:spPr>
+        <p:txBody>
+          <a:bodyPr wrap="square" anchor="t">
+            <a:spAutoFit/>
+          </a:bodyPr>
+          <a:lstStyle/>
+          <a:p>
+            <a:pPr algn="r">
+              <a:lnSpc>
+                <a:spcPct val="100000"/>
+              </a:lnSpc>
+            </a:pPr>
+            <a:r>
+              <a:rPr sz="1400" b="1">
+                <a:solidFill>
+                  <a:srgbClr val="00B8EC"/>
+                </a:solidFill>
+                <a:latin typeface="Arial"/>
+              </a:rPr>
+              <a:t>May – mid-June</a:t>
+            </a:r>
+          </a:p>
+        </p:txBody>
+      </p:sp>
+      <p:sp>
+        <p:nvSpPr>
+          <p:cNvPr id="11" name="Rectangle 10"/>
           <p:cNvSpPr/>
           <p:nvPr/>
         </p:nvSpPr>
         <p:spPr>
           <a:xfrm>
-            <a:off x="4334256" y="1828800"/>
-            <a:ext cx="3520440" cy="1920240"/>
+            <a:off x="640080" y="3429000"/>
+            <a:ext cx="10911535" cy="1325880"/>
           </a:xfrm>
           <a:prstGeom prst="rect">
             <a:avLst/>
@@ -8553,20 +8694,20 @@
       </p:sp>
       <p:sp>
         <p:nvSpPr>
-          <p:cNvPr id="11" name="Rectangle 10"/>
+          <p:cNvPr id="12" name="Rectangle 11"/>
           <p:cNvSpPr/>
           <p:nvPr/>
         </p:nvSpPr>
         <p:spPr>
           <a:xfrm>
-            <a:off x="4334256" y="1828800"/>
-            <a:ext cx="73152" cy="1920240"/>
+            <a:off x="640080" y="3429000"/>
+            <a:ext cx="91440" cy="1325880"/>
           </a:xfrm>
           <a:prstGeom prst="rect">
             <a:avLst/>
           </a:prstGeom>
           <a:solidFill>
-            <a:srgbClr val="00B8EC"/>
+            <a:srgbClr val="EC6A37"/>
           </a:solidFill>
           <a:ln>
             <a:noFill/>
@@ -8597,14 +8738,14 @@
       </p:sp>
       <p:sp>
         <p:nvSpPr>
-          <p:cNvPr id="12" name="TextBox 11"/>
+          <p:cNvPr id="13" name="TextBox 12"/>
           <p:cNvSpPr txBox="1"/>
           <p:nvPr/>
         </p:nvSpPr>
         <p:spPr>
           <a:xfrm>
-            <a:off x="4562856" y="1993392"/>
-            <a:ext cx="3154680" cy="457200"/>
+            <a:off x="914400" y="3575304"/>
+            <a:ext cx="7772400" cy="457200"/>
           </a:xfrm>
           <a:prstGeom prst="rect">
             <a:avLst/>
@@ -8623,27 +8764,27 @@
               </a:lnSpc>
             </a:pPr>
             <a:r>
-              <a:rPr sz="1600" b="1">
+              <a:rPr sz="1800" b="1">
                 <a:solidFill>
                   <a:srgbClr val="FFFFFF"/>
                 </a:solidFill>
                 <a:latin typeface="Arial"/>
               </a:rPr>
-              <a:t>End-to-end</a:t>
-            </a:r>
-          </a:p>
-        </p:txBody>
-      </p:sp>
-      <p:sp>
-        <p:nvSpPr>
-          <p:cNvPr id="13" name="TextBox 12"/>
+              <a:t>Phase 2 · Backend &amp; Identity</a:t>
+            </a:r>
+          </a:p>
+        </p:txBody>
+      </p:sp>
+      <p:sp>
+        <p:nvSpPr>
+          <p:cNvPr id="14" name="TextBox 13"/>
           <p:cNvSpPr txBox="1"/>
           <p:nvPr/>
         </p:nvSpPr>
         <p:spPr>
           <a:xfrm>
-            <a:off x="4562856" y="2487168"/>
-            <a:ext cx="3154680" cy="1143000"/>
+            <a:off x="914400" y="4087368"/>
+            <a:ext cx="8686800" cy="548640"/>
           </a:xfrm>
           <a:prstGeom prst="rect">
             <a:avLst/>
@@ -8658,31 +8799,70 @@
           <a:p>
             <a:pPr algn="l">
               <a:lnSpc>
-                <a:spcPct val="110000"/>
+                <a:spcPct val="100000"/>
               </a:lnSpc>
             </a:pPr>
             <a:r>
-              <a:rPr sz="1250" b="0">
+              <a:rPr sz="1300" b="0">
                 <a:solidFill>
                   <a:srgbClr val="BDC1C6"/>
                 </a:solidFill>
                 <a:latin typeface="Arial"/>
               </a:rPr>
-              <a:t>Maestro / Detox for native flows; Cypress for web. Runs in Azure DevOps CI on every push.</a:t>
-            </a:r>
-          </a:p>
-        </p:txBody>
-      </p:sp>
-      <p:sp>
-        <p:nvSpPr>
-          <p:cNvPr id="14" name="Rectangle 13"/>
+              <a:t>API Server + Azure Cloud DB live; Microsoft Entra ID sign-in; retire mocks.</a:t>
+            </a:r>
+          </a:p>
+        </p:txBody>
+      </p:sp>
+      <p:sp>
+        <p:nvSpPr>
+          <p:cNvPr id="15" name="TextBox 14"/>
+          <p:cNvSpPr txBox="1"/>
+          <p:nvPr/>
+        </p:nvSpPr>
+        <p:spPr>
+          <a:xfrm>
+            <a:off x="9144000" y="3840480"/>
+            <a:ext cx="2377440" cy="548640"/>
+          </a:xfrm>
+          <a:prstGeom prst="rect">
+            <a:avLst/>
+          </a:prstGeom>
+          <a:noFill/>
+        </p:spPr>
+        <p:txBody>
+          <a:bodyPr wrap="square" anchor="t">
+            <a:spAutoFit/>
+          </a:bodyPr>
+          <a:lstStyle/>
+          <a:p>
+            <a:pPr algn="r">
+              <a:lnSpc>
+                <a:spcPct val="100000"/>
+              </a:lnSpc>
+            </a:pPr>
+            <a:r>
+              <a:rPr sz="1400" b="1">
+                <a:solidFill>
+                  <a:srgbClr val="EC6A37"/>
+                </a:solidFill>
+                <a:latin typeface="Arial"/>
+              </a:rPr>
+              <a:t>mid-June – mid-July</a:t>
+            </a:r>
+          </a:p>
+        </p:txBody>
+      </p:sp>
+      <p:sp>
+        <p:nvSpPr>
+          <p:cNvPr id="16" name="Rectangle 15"/>
           <p:cNvSpPr/>
           <p:nvPr/>
         </p:nvSpPr>
         <p:spPr>
           <a:xfrm>
-            <a:off x="8028431" y="1828800"/>
-            <a:ext cx="3520440" cy="1920240"/>
+            <a:off x="640080" y="4937760"/>
+            <a:ext cx="10911535" cy="1325880"/>
           </a:xfrm>
           <a:prstGeom prst="rect">
             <a:avLst/>
@@ -8721,14 +8901,245 @@
       </p:sp>
       <p:sp>
         <p:nvSpPr>
-          <p:cNvPr id="15" name="Rectangle 14"/>
+          <p:cNvPr id="17" name="Rectangle 16"/>
           <p:cNvSpPr/>
           <p:nvPr/>
         </p:nvSpPr>
         <p:spPr>
           <a:xfrm>
-            <a:off x="8028431" y="1828800"/>
-            <a:ext cx="73152" cy="1920240"/>
+            <a:off x="640080" y="4937760"/>
+            <a:ext cx="91440" cy="1325880"/>
+          </a:xfrm>
+          <a:prstGeom prst="rect">
+            <a:avLst/>
+          </a:prstGeom>
+          <a:solidFill>
+            <a:srgbClr val="9ECD3B"/>
+          </a:solidFill>
+          <a:ln>
+            <a:noFill/>
+          </a:ln>
+          <a:effectLst/>
+        </p:spPr>
+        <p:style>
+          <a:lnRef idx="1">
+            <a:schemeClr val="accent1"/>
+          </a:lnRef>
+          <a:fillRef idx="3">
+            <a:schemeClr val="accent1"/>
+          </a:fillRef>
+          <a:effectRef idx="2">
+            <a:schemeClr val="accent1"/>
+          </a:effectRef>
+          <a:fontRef idx="minor">
+            <a:schemeClr val="lt1"/>
+          </a:fontRef>
+        </p:style>
+        <p:txBody>
+          <a:bodyPr rtlCol="0" anchor="ctr"/>
+          <a:lstStyle/>
+          <a:p>
+            <a:pPr algn="ctr"/>
+          </a:p>
+        </p:txBody>
+      </p:sp>
+      <p:sp>
+        <p:nvSpPr>
+          <p:cNvPr id="18" name="TextBox 17"/>
+          <p:cNvSpPr txBox="1"/>
+          <p:nvPr/>
+        </p:nvSpPr>
+        <p:spPr>
+          <a:xfrm>
+            <a:off x="914400" y="5084064"/>
+            <a:ext cx="7772400" cy="457200"/>
+          </a:xfrm>
+          <a:prstGeom prst="rect">
+            <a:avLst/>
+          </a:prstGeom>
+          <a:noFill/>
+        </p:spPr>
+        <p:txBody>
+          <a:bodyPr wrap="square" anchor="t">
+            <a:spAutoFit/>
+          </a:bodyPr>
+          <a:lstStyle/>
+          <a:p>
+            <a:pPr algn="l">
+              <a:lnSpc>
+                <a:spcPct val="100000"/>
+              </a:lnSpc>
+            </a:pPr>
+            <a:r>
+              <a:rPr sz="1800" b="1">
+                <a:solidFill>
+                  <a:srgbClr val="FFFFFF"/>
+                </a:solidFill>
+                <a:latin typeface="Arial"/>
+              </a:rPr>
+              <a:t>Phase 3 · Storage, Integrations &amp; Hardening</a:t>
+            </a:r>
+          </a:p>
+        </p:txBody>
+      </p:sp>
+      <p:sp>
+        <p:nvSpPr>
+          <p:cNvPr id="19" name="TextBox 18"/>
+          <p:cNvSpPr txBox="1"/>
+          <p:nvPr/>
+        </p:nvSpPr>
+        <p:spPr>
+          <a:xfrm>
+            <a:off x="914400" y="5596128"/>
+            <a:ext cx="8686800" cy="548640"/>
+          </a:xfrm>
+          <a:prstGeom prst="rect">
+            <a:avLst/>
+          </a:prstGeom>
+          <a:noFill/>
+        </p:spPr>
+        <p:txBody>
+          <a:bodyPr wrap="square" anchor="t">
+            <a:spAutoFit/>
+          </a:bodyPr>
+          <a:lstStyle/>
+          <a:p>
+            <a:pPr algn="l">
+              <a:lnSpc>
+                <a:spcPct val="100000"/>
+              </a:lnSpc>
+            </a:pPr>
+            <a:r>
+              <a:rPr sz="1300" b="0">
+                <a:solidFill>
+                  <a:srgbClr val="BDC1C6"/>
+                </a:solidFill>
+                <a:latin typeface="Arial"/>
+              </a:rPr>
+              <a:t>Azure Blob Storage, push, auto-publish, branding, testing, native builds, UAT.</a:t>
+            </a:r>
+          </a:p>
+        </p:txBody>
+      </p:sp>
+      <p:sp>
+        <p:nvSpPr>
+          <p:cNvPr id="20" name="TextBox 19"/>
+          <p:cNvSpPr txBox="1"/>
+          <p:nvPr/>
+        </p:nvSpPr>
+        <p:spPr>
+          <a:xfrm>
+            <a:off x="9144000" y="5349240"/>
+            <a:ext cx="2377440" cy="548640"/>
+          </a:xfrm>
+          <a:prstGeom prst="rect">
+            <a:avLst/>
+          </a:prstGeom>
+          <a:noFill/>
+        </p:spPr>
+        <p:txBody>
+          <a:bodyPr wrap="square" anchor="t">
+            <a:spAutoFit/>
+          </a:bodyPr>
+          <a:lstStyle/>
+          <a:p>
+            <a:pPr algn="r">
+              <a:lnSpc>
+                <a:spcPct val="100000"/>
+              </a:lnSpc>
+            </a:pPr>
+            <a:r>
+              <a:rPr sz="1400" b="1">
+                <a:solidFill>
+                  <a:srgbClr val="9ECD3B"/>
+                </a:solidFill>
+                <a:latin typeface="Arial"/>
+              </a:rPr>
+              <a:t>mid-July – end Aug</a:t>
+            </a:r>
+          </a:p>
+        </p:txBody>
+      </p:sp>
+    </p:spTree>
+  </p:cSld>
+  <p:clrMapOvr>
+    <a:masterClrMapping/>
+  </p:clrMapOvr>
+</p:sld>
+</file>
+
+<file path=ppt/slides/slide8.xml><?xml version="1.0" encoding="utf-8"?>
+<p:sld xmlns:a="http://schemas.openxmlformats.org/drawingml/2006/main" xmlns:p="http://schemas.openxmlformats.org/presentationml/2006/main" xmlns:r="http://schemas.openxmlformats.org/officeDocument/2006/relationships">
+  <p:cSld>
+    <p:bg>
+      <p:bgPr>
+        <a:solidFill>
+          <a:srgbClr val="1E1E1E"/>
+        </a:solidFill>
+        <a:effectLst/>
+      </p:bgPr>
+    </p:bg>
+    <p:spTree>
+      <p:nvGrpSpPr>
+        <p:cNvPr id="1" name=""/>
+        <p:cNvGrpSpPr/>
+        <p:nvPr/>
+      </p:nvGrpSpPr>
+      <p:grpSpPr/>
+      <p:sp>
+        <p:nvSpPr>
+          <p:cNvPr id="2" name="Rectangle 1"/>
+          <p:cNvSpPr/>
+          <p:nvPr/>
+        </p:nvSpPr>
+        <p:spPr>
+          <a:xfrm>
+            <a:off x="0" y="0"/>
+            <a:ext cx="12191695" cy="164592"/>
+          </a:xfrm>
+          <a:prstGeom prst="rect">
+            <a:avLst/>
+          </a:prstGeom>
+          <a:solidFill>
+            <a:srgbClr val="00B8EC"/>
+          </a:solidFill>
+          <a:ln>
+            <a:noFill/>
+          </a:ln>
+          <a:effectLst/>
+        </p:spPr>
+        <p:style>
+          <a:lnRef idx="1">
+            <a:schemeClr val="accent1"/>
+          </a:lnRef>
+          <a:fillRef idx="3">
+            <a:schemeClr val="accent1"/>
+          </a:fillRef>
+          <a:effectRef idx="2">
+            <a:schemeClr val="accent1"/>
+          </a:effectRef>
+          <a:fontRef idx="minor">
+            <a:schemeClr val="lt1"/>
+          </a:fontRef>
+        </p:style>
+        <p:txBody>
+          <a:bodyPr rtlCol="0" anchor="ctr"/>
+          <a:lstStyle/>
+          <a:p>
+            <a:pPr algn="ctr"/>
+          </a:p>
+        </p:txBody>
+      </p:sp>
+      <p:sp>
+        <p:nvSpPr>
+          <p:cNvPr id="3" name="Rectangle 2"/>
+          <p:cNvSpPr/>
+          <p:nvPr/>
+        </p:nvSpPr>
+        <p:spPr>
+          <a:xfrm>
+            <a:off x="0" y="164592"/>
+            <a:ext cx="4023360" cy="54864"/>
           </a:xfrm>
           <a:prstGeom prst="rect">
             <a:avLst/>
@@ -8765,14 +9176,14 @@
       </p:sp>
       <p:sp>
         <p:nvSpPr>
-          <p:cNvPr id="16" name="TextBox 15"/>
+          <p:cNvPr id="4" name="TextBox 3"/>
           <p:cNvSpPr txBox="1"/>
           <p:nvPr/>
         </p:nvSpPr>
         <p:spPr>
           <a:xfrm>
-            <a:off x="8257031" y="1993392"/>
-            <a:ext cx="3154680" cy="457200"/>
+            <a:off x="548640" y="411480"/>
+            <a:ext cx="10972800" cy="365760"/>
           </a:xfrm>
           <a:prstGeom prst="rect">
             <a:avLst/>
@@ -8791,27 +9202,27 @@
               </a:lnSpc>
             </a:pPr>
             <a:r>
-              <a:rPr sz="1600" b="1">
-                <a:solidFill>
-                  <a:srgbClr val="FFFFFF"/>
-                </a:solidFill>
-                <a:latin typeface="Arial"/>
-              </a:rPr>
-              <a:t>UAT</a:t>
-            </a:r>
-          </a:p>
-        </p:txBody>
-      </p:sp>
-      <p:sp>
-        <p:nvSpPr>
-          <p:cNvPr id="17" name="TextBox 16"/>
+              <a:rPr sz="1300" b="1">
+                <a:solidFill>
+                  <a:srgbClr val="EC6A37"/>
+                </a:solidFill>
+                <a:latin typeface="Arial"/>
+              </a:rPr>
+              <a:t>QUALITY</a:t>
+            </a:r>
+          </a:p>
+        </p:txBody>
+      </p:sp>
+      <p:sp>
+        <p:nvSpPr>
+          <p:cNvPr id="5" name="TextBox 4"/>
           <p:cNvSpPr txBox="1"/>
           <p:nvPr/>
         </p:nvSpPr>
         <p:spPr>
           <a:xfrm>
-            <a:off x="8257031" y="2487168"/>
-            <a:ext cx="3154680" cy="1143000"/>
+            <a:off x="548640" y="731520"/>
+            <a:ext cx="11064240" cy="822960"/>
           </a:xfrm>
           <a:prstGeom prst="rect">
             <a:avLst/>
@@ -8826,31 +9237,31 @@
           <a:p>
             <a:pPr algn="l">
               <a:lnSpc>
-                <a:spcPct val="110000"/>
+                <a:spcPct val="100000"/>
               </a:lnSpc>
             </a:pPr>
             <a:r>
-              <a:rPr sz="1250" b="0">
-                <a:solidFill>
-                  <a:srgbClr val="BDC1C6"/>
-                </a:solidFill>
-                <a:latin typeface="Arial"/>
-              </a:rPr>
-              <a:t>Band staff &amp; council validate every feature per role against a scripted checklist before release.</a:t>
-            </a:r>
-          </a:p>
-        </p:txBody>
-      </p:sp>
-      <p:sp>
-        <p:nvSpPr>
-          <p:cNvPr id="18" name="Rectangle 17"/>
+              <a:rPr sz="3000" b="1">
+                <a:solidFill>
+                  <a:srgbClr val="FFFFFF"/>
+                </a:solidFill>
+                <a:latin typeface="Arial"/>
+              </a:rPr>
+              <a:t>Testing &amp; distribution</a:t>
+            </a:r>
+          </a:p>
+        </p:txBody>
+      </p:sp>
+      <p:sp>
+        <p:nvSpPr>
+          <p:cNvPr id="6" name="Rectangle 5"/>
           <p:cNvSpPr/>
           <p:nvPr/>
         </p:nvSpPr>
         <p:spPr>
           <a:xfrm>
-            <a:off x="640080" y="3931920"/>
-            <a:ext cx="5394960" cy="1828800"/>
+            <a:off x="640080" y="1828800"/>
+            <a:ext cx="3520440" cy="1920240"/>
           </a:xfrm>
           <a:prstGeom prst="rect">
             <a:avLst/>
@@ -8889,20 +9300,20 @@
       </p:sp>
       <p:sp>
         <p:nvSpPr>
-          <p:cNvPr id="19" name="Rectangle 18"/>
+          <p:cNvPr id="7" name="Rectangle 6"/>
           <p:cNvSpPr/>
           <p:nvPr/>
         </p:nvSpPr>
         <p:spPr>
           <a:xfrm>
-            <a:off x="640080" y="3931920"/>
-            <a:ext cx="73152" cy="1828800"/>
+            <a:off x="640080" y="1828800"/>
+            <a:ext cx="73152" cy="1920240"/>
           </a:xfrm>
           <a:prstGeom prst="rect">
             <a:avLst/>
           </a:prstGeom>
           <a:solidFill>
-            <a:srgbClr val="EC6A37"/>
+            <a:srgbClr val="00B8EC"/>
           </a:solidFill>
           <a:ln>
             <a:noFill/>
@@ -8933,14 +9344,14 @@
       </p:sp>
       <p:sp>
         <p:nvSpPr>
-          <p:cNvPr id="20" name="TextBox 19"/>
+          <p:cNvPr id="8" name="TextBox 7"/>
           <p:cNvSpPr txBox="1"/>
           <p:nvPr/>
         </p:nvSpPr>
         <p:spPr>
           <a:xfrm>
-            <a:off x="868680" y="4096512"/>
-            <a:ext cx="5029200" cy="457200"/>
+            <a:off x="868680" y="1993392"/>
+            <a:ext cx="3154680" cy="457200"/>
           </a:xfrm>
           <a:prstGeom prst="rect">
             <a:avLst/>
@@ -8965,21 +9376,21 @@
                 </a:solidFill>
                 <a:latin typeface="Arial"/>
               </a:rPr>
-              <a:t>iOS — TestFlight</a:t>
-            </a:r>
-          </a:p>
-        </p:txBody>
-      </p:sp>
-      <p:sp>
-        <p:nvSpPr>
-          <p:cNvPr id="21" name="TextBox 20"/>
+              <a:t>Unit &amp; integration</a:t>
+            </a:r>
+          </a:p>
+        </p:txBody>
+      </p:sp>
+      <p:sp>
+        <p:nvSpPr>
+          <p:cNvPr id="9" name="TextBox 8"/>
           <p:cNvSpPr txBox="1"/>
           <p:nvPr/>
         </p:nvSpPr>
         <p:spPr>
           <a:xfrm>
-            <a:off x="868680" y="4590288"/>
-            <a:ext cx="5029200" cy="1051560"/>
+            <a:off x="868680" y="2487168"/>
+            <a:ext cx="3154680" cy="1143000"/>
           </a:xfrm>
           <a:prstGeom prst="rect">
             <a:avLst/>
@@ -9004,21 +9415,21 @@
                 </a:solidFill>
                 <a:latin typeface="Arial"/>
               </a:rPr>
-              <a:t>EAS Build → TestFlight for internal &amp; external testers on their own devices. Promote to App Store after UAT.</a:t>
-            </a:r>
-          </a:p>
-        </p:txBody>
-      </p:sp>
-      <p:sp>
-        <p:nvSpPr>
-          <p:cNvPr id="22" name="Rectangle 21"/>
+              <a:t>Jest tests for the store, thunks, and mock API; React Native Testing Library for screens and role gating.</a:t>
+            </a:r>
+          </a:p>
+        </p:txBody>
+      </p:sp>
+      <p:sp>
+        <p:nvSpPr>
+          <p:cNvPr id="10" name="Rectangle 9"/>
           <p:cNvSpPr/>
           <p:nvPr/>
         </p:nvSpPr>
         <p:spPr>
           <a:xfrm>
-            <a:off x="6163056" y="3931920"/>
-            <a:ext cx="5394960" cy="1828800"/>
+            <a:off x="4334256" y="1828800"/>
+            <a:ext cx="3520440" cy="1920240"/>
           </a:xfrm>
           <a:prstGeom prst="rect">
             <a:avLst/>
@@ -9057,6 +9468,510 @@
       </p:sp>
       <p:sp>
         <p:nvSpPr>
+          <p:cNvPr id="11" name="Rectangle 10"/>
+          <p:cNvSpPr/>
+          <p:nvPr/>
+        </p:nvSpPr>
+        <p:spPr>
+          <a:xfrm>
+            <a:off x="4334256" y="1828800"/>
+            <a:ext cx="73152" cy="1920240"/>
+          </a:xfrm>
+          <a:prstGeom prst="rect">
+            <a:avLst/>
+          </a:prstGeom>
+          <a:solidFill>
+            <a:srgbClr val="00B8EC"/>
+          </a:solidFill>
+          <a:ln>
+            <a:noFill/>
+          </a:ln>
+          <a:effectLst/>
+        </p:spPr>
+        <p:style>
+          <a:lnRef idx="1">
+            <a:schemeClr val="accent1"/>
+          </a:lnRef>
+          <a:fillRef idx="3">
+            <a:schemeClr val="accent1"/>
+          </a:fillRef>
+          <a:effectRef idx="2">
+            <a:schemeClr val="accent1"/>
+          </a:effectRef>
+          <a:fontRef idx="minor">
+            <a:schemeClr val="lt1"/>
+          </a:fontRef>
+        </p:style>
+        <p:txBody>
+          <a:bodyPr rtlCol="0" anchor="ctr"/>
+          <a:lstStyle/>
+          <a:p>
+            <a:pPr algn="ctr"/>
+          </a:p>
+        </p:txBody>
+      </p:sp>
+      <p:sp>
+        <p:nvSpPr>
+          <p:cNvPr id="12" name="TextBox 11"/>
+          <p:cNvSpPr txBox="1"/>
+          <p:nvPr/>
+        </p:nvSpPr>
+        <p:spPr>
+          <a:xfrm>
+            <a:off x="4562856" y="1993392"/>
+            <a:ext cx="3154680" cy="457200"/>
+          </a:xfrm>
+          <a:prstGeom prst="rect">
+            <a:avLst/>
+          </a:prstGeom>
+          <a:noFill/>
+        </p:spPr>
+        <p:txBody>
+          <a:bodyPr wrap="square" anchor="t">
+            <a:spAutoFit/>
+          </a:bodyPr>
+          <a:lstStyle/>
+          <a:p>
+            <a:pPr algn="l">
+              <a:lnSpc>
+                <a:spcPct val="100000"/>
+              </a:lnSpc>
+            </a:pPr>
+            <a:r>
+              <a:rPr sz="1600" b="1">
+                <a:solidFill>
+                  <a:srgbClr val="FFFFFF"/>
+                </a:solidFill>
+                <a:latin typeface="Arial"/>
+              </a:rPr>
+              <a:t>End-to-end</a:t>
+            </a:r>
+          </a:p>
+        </p:txBody>
+      </p:sp>
+      <p:sp>
+        <p:nvSpPr>
+          <p:cNvPr id="13" name="TextBox 12"/>
+          <p:cNvSpPr txBox="1"/>
+          <p:nvPr/>
+        </p:nvSpPr>
+        <p:spPr>
+          <a:xfrm>
+            <a:off x="4562856" y="2487168"/>
+            <a:ext cx="3154680" cy="1143000"/>
+          </a:xfrm>
+          <a:prstGeom prst="rect">
+            <a:avLst/>
+          </a:prstGeom>
+          <a:noFill/>
+        </p:spPr>
+        <p:txBody>
+          <a:bodyPr wrap="square" anchor="t">
+            <a:spAutoFit/>
+          </a:bodyPr>
+          <a:lstStyle/>
+          <a:p>
+            <a:pPr algn="l">
+              <a:lnSpc>
+                <a:spcPct val="110000"/>
+              </a:lnSpc>
+            </a:pPr>
+            <a:r>
+              <a:rPr sz="1250" b="0">
+                <a:solidFill>
+                  <a:srgbClr val="BDC1C6"/>
+                </a:solidFill>
+                <a:latin typeface="Arial"/>
+              </a:rPr>
+              <a:t>Maestro / Detox for native flows; Cypress for web. Runs in Azure DevOps CI on every push.</a:t>
+            </a:r>
+          </a:p>
+        </p:txBody>
+      </p:sp>
+      <p:sp>
+        <p:nvSpPr>
+          <p:cNvPr id="14" name="Rectangle 13"/>
+          <p:cNvSpPr/>
+          <p:nvPr/>
+        </p:nvSpPr>
+        <p:spPr>
+          <a:xfrm>
+            <a:off x="8028431" y="1828800"/>
+            <a:ext cx="3520440" cy="1920240"/>
+          </a:xfrm>
+          <a:prstGeom prst="rect">
+            <a:avLst/>
+          </a:prstGeom>
+          <a:solidFill>
+            <a:srgbClr val="1D1D1D"/>
+          </a:solidFill>
+          <a:ln w="12700">
+            <a:solidFill>
+              <a:srgbClr val="3A3A3A"/>
+            </a:solidFill>
+          </a:ln>
+          <a:effectLst/>
+        </p:spPr>
+        <p:style>
+          <a:lnRef idx="1">
+            <a:schemeClr val="accent1"/>
+          </a:lnRef>
+          <a:fillRef idx="3">
+            <a:schemeClr val="accent1"/>
+          </a:fillRef>
+          <a:effectRef idx="2">
+            <a:schemeClr val="accent1"/>
+          </a:effectRef>
+          <a:fontRef idx="minor">
+            <a:schemeClr val="lt1"/>
+          </a:fontRef>
+        </p:style>
+        <p:txBody>
+          <a:bodyPr rtlCol="0" anchor="ctr"/>
+          <a:lstStyle/>
+          <a:p>
+            <a:pPr algn="ctr"/>
+          </a:p>
+        </p:txBody>
+      </p:sp>
+      <p:sp>
+        <p:nvSpPr>
+          <p:cNvPr id="15" name="Rectangle 14"/>
+          <p:cNvSpPr/>
+          <p:nvPr/>
+        </p:nvSpPr>
+        <p:spPr>
+          <a:xfrm>
+            <a:off x="8028431" y="1828800"/>
+            <a:ext cx="73152" cy="1920240"/>
+          </a:xfrm>
+          <a:prstGeom prst="rect">
+            <a:avLst/>
+          </a:prstGeom>
+          <a:solidFill>
+            <a:srgbClr val="EC6A37"/>
+          </a:solidFill>
+          <a:ln>
+            <a:noFill/>
+          </a:ln>
+          <a:effectLst/>
+        </p:spPr>
+        <p:style>
+          <a:lnRef idx="1">
+            <a:schemeClr val="accent1"/>
+          </a:lnRef>
+          <a:fillRef idx="3">
+            <a:schemeClr val="accent1"/>
+          </a:fillRef>
+          <a:effectRef idx="2">
+            <a:schemeClr val="accent1"/>
+          </a:effectRef>
+          <a:fontRef idx="minor">
+            <a:schemeClr val="lt1"/>
+          </a:fontRef>
+        </p:style>
+        <p:txBody>
+          <a:bodyPr rtlCol="0" anchor="ctr"/>
+          <a:lstStyle/>
+          <a:p>
+            <a:pPr algn="ctr"/>
+          </a:p>
+        </p:txBody>
+      </p:sp>
+      <p:sp>
+        <p:nvSpPr>
+          <p:cNvPr id="16" name="TextBox 15"/>
+          <p:cNvSpPr txBox="1"/>
+          <p:nvPr/>
+        </p:nvSpPr>
+        <p:spPr>
+          <a:xfrm>
+            <a:off x="8257031" y="1993392"/>
+            <a:ext cx="3154680" cy="457200"/>
+          </a:xfrm>
+          <a:prstGeom prst="rect">
+            <a:avLst/>
+          </a:prstGeom>
+          <a:noFill/>
+        </p:spPr>
+        <p:txBody>
+          <a:bodyPr wrap="square" anchor="t">
+            <a:spAutoFit/>
+          </a:bodyPr>
+          <a:lstStyle/>
+          <a:p>
+            <a:pPr algn="l">
+              <a:lnSpc>
+                <a:spcPct val="100000"/>
+              </a:lnSpc>
+            </a:pPr>
+            <a:r>
+              <a:rPr sz="1600" b="1">
+                <a:solidFill>
+                  <a:srgbClr val="FFFFFF"/>
+                </a:solidFill>
+                <a:latin typeface="Arial"/>
+              </a:rPr>
+              <a:t>UAT</a:t>
+            </a:r>
+          </a:p>
+        </p:txBody>
+      </p:sp>
+      <p:sp>
+        <p:nvSpPr>
+          <p:cNvPr id="17" name="TextBox 16"/>
+          <p:cNvSpPr txBox="1"/>
+          <p:nvPr/>
+        </p:nvSpPr>
+        <p:spPr>
+          <a:xfrm>
+            <a:off x="8257031" y="2487168"/>
+            <a:ext cx="3154680" cy="1143000"/>
+          </a:xfrm>
+          <a:prstGeom prst="rect">
+            <a:avLst/>
+          </a:prstGeom>
+          <a:noFill/>
+        </p:spPr>
+        <p:txBody>
+          <a:bodyPr wrap="square" anchor="t">
+            <a:spAutoFit/>
+          </a:bodyPr>
+          <a:lstStyle/>
+          <a:p>
+            <a:pPr algn="l">
+              <a:lnSpc>
+                <a:spcPct val="110000"/>
+              </a:lnSpc>
+            </a:pPr>
+            <a:r>
+              <a:rPr sz="1250" b="0">
+                <a:solidFill>
+                  <a:srgbClr val="BDC1C6"/>
+                </a:solidFill>
+                <a:latin typeface="Arial"/>
+              </a:rPr>
+              <a:t>Band staff &amp; council validate every feature per role against a scripted checklist before release.</a:t>
+            </a:r>
+          </a:p>
+        </p:txBody>
+      </p:sp>
+      <p:sp>
+        <p:nvSpPr>
+          <p:cNvPr id="18" name="Rectangle 17"/>
+          <p:cNvSpPr/>
+          <p:nvPr/>
+        </p:nvSpPr>
+        <p:spPr>
+          <a:xfrm>
+            <a:off x="640080" y="3931920"/>
+            <a:ext cx="5394960" cy="1828800"/>
+          </a:xfrm>
+          <a:prstGeom prst="rect">
+            <a:avLst/>
+          </a:prstGeom>
+          <a:solidFill>
+            <a:srgbClr val="1D1D1D"/>
+          </a:solidFill>
+          <a:ln w="12700">
+            <a:solidFill>
+              <a:srgbClr val="3A3A3A"/>
+            </a:solidFill>
+          </a:ln>
+          <a:effectLst/>
+        </p:spPr>
+        <p:style>
+          <a:lnRef idx="1">
+            <a:schemeClr val="accent1"/>
+          </a:lnRef>
+          <a:fillRef idx="3">
+            <a:schemeClr val="accent1"/>
+          </a:fillRef>
+          <a:effectRef idx="2">
+            <a:schemeClr val="accent1"/>
+          </a:effectRef>
+          <a:fontRef idx="minor">
+            <a:schemeClr val="lt1"/>
+          </a:fontRef>
+        </p:style>
+        <p:txBody>
+          <a:bodyPr rtlCol="0" anchor="ctr"/>
+          <a:lstStyle/>
+          <a:p>
+            <a:pPr algn="ctr"/>
+          </a:p>
+        </p:txBody>
+      </p:sp>
+      <p:sp>
+        <p:nvSpPr>
+          <p:cNvPr id="19" name="Rectangle 18"/>
+          <p:cNvSpPr/>
+          <p:nvPr/>
+        </p:nvSpPr>
+        <p:spPr>
+          <a:xfrm>
+            <a:off x="640080" y="3931920"/>
+            <a:ext cx="73152" cy="1828800"/>
+          </a:xfrm>
+          <a:prstGeom prst="rect">
+            <a:avLst/>
+          </a:prstGeom>
+          <a:solidFill>
+            <a:srgbClr val="EC6A37"/>
+          </a:solidFill>
+          <a:ln>
+            <a:noFill/>
+          </a:ln>
+          <a:effectLst/>
+        </p:spPr>
+        <p:style>
+          <a:lnRef idx="1">
+            <a:schemeClr val="accent1"/>
+          </a:lnRef>
+          <a:fillRef idx="3">
+            <a:schemeClr val="accent1"/>
+          </a:fillRef>
+          <a:effectRef idx="2">
+            <a:schemeClr val="accent1"/>
+          </a:effectRef>
+          <a:fontRef idx="minor">
+            <a:schemeClr val="lt1"/>
+          </a:fontRef>
+        </p:style>
+        <p:txBody>
+          <a:bodyPr rtlCol="0" anchor="ctr"/>
+          <a:lstStyle/>
+          <a:p>
+            <a:pPr algn="ctr"/>
+          </a:p>
+        </p:txBody>
+      </p:sp>
+      <p:sp>
+        <p:nvSpPr>
+          <p:cNvPr id="20" name="TextBox 19"/>
+          <p:cNvSpPr txBox="1"/>
+          <p:nvPr/>
+        </p:nvSpPr>
+        <p:spPr>
+          <a:xfrm>
+            <a:off x="868680" y="4096512"/>
+            <a:ext cx="5029200" cy="457200"/>
+          </a:xfrm>
+          <a:prstGeom prst="rect">
+            <a:avLst/>
+          </a:prstGeom>
+          <a:noFill/>
+        </p:spPr>
+        <p:txBody>
+          <a:bodyPr wrap="square" anchor="t">
+            <a:spAutoFit/>
+          </a:bodyPr>
+          <a:lstStyle/>
+          <a:p>
+            <a:pPr algn="l">
+              <a:lnSpc>
+                <a:spcPct val="100000"/>
+              </a:lnSpc>
+            </a:pPr>
+            <a:r>
+              <a:rPr sz="1600" b="1">
+                <a:solidFill>
+                  <a:srgbClr val="FFFFFF"/>
+                </a:solidFill>
+                <a:latin typeface="Arial"/>
+              </a:rPr>
+              <a:t>iOS — TestFlight</a:t>
+            </a:r>
+          </a:p>
+        </p:txBody>
+      </p:sp>
+      <p:sp>
+        <p:nvSpPr>
+          <p:cNvPr id="21" name="TextBox 20"/>
+          <p:cNvSpPr txBox="1"/>
+          <p:nvPr/>
+        </p:nvSpPr>
+        <p:spPr>
+          <a:xfrm>
+            <a:off x="868680" y="4590288"/>
+            <a:ext cx="5029200" cy="1051560"/>
+          </a:xfrm>
+          <a:prstGeom prst="rect">
+            <a:avLst/>
+          </a:prstGeom>
+          <a:noFill/>
+        </p:spPr>
+        <p:txBody>
+          <a:bodyPr wrap="square" anchor="t">
+            <a:spAutoFit/>
+          </a:bodyPr>
+          <a:lstStyle/>
+          <a:p>
+            <a:pPr algn="l">
+              <a:lnSpc>
+                <a:spcPct val="110000"/>
+              </a:lnSpc>
+            </a:pPr>
+            <a:r>
+              <a:rPr sz="1250" b="0">
+                <a:solidFill>
+                  <a:srgbClr val="BDC1C6"/>
+                </a:solidFill>
+                <a:latin typeface="Arial"/>
+              </a:rPr>
+              <a:t>EAS Build → TestFlight for internal &amp; external testers on their own devices. Promote to App Store after UAT.</a:t>
+            </a:r>
+          </a:p>
+        </p:txBody>
+      </p:sp>
+      <p:sp>
+        <p:nvSpPr>
+          <p:cNvPr id="22" name="Rectangle 21"/>
+          <p:cNvSpPr/>
+          <p:nvPr/>
+        </p:nvSpPr>
+        <p:spPr>
+          <a:xfrm>
+            <a:off x="6163056" y="3931920"/>
+            <a:ext cx="5394960" cy="1828800"/>
+          </a:xfrm>
+          <a:prstGeom prst="rect">
+            <a:avLst/>
+          </a:prstGeom>
+          <a:solidFill>
+            <a:srgbClr val="1D1D1D"/>
+          </a:solidFill>
+          <a:ln w="12700">
+            <a:solidFill>
+              <a:srgbClr val="3A3A3A"/>
+            </a:solidFill>
+          </a:ln>
+          <a:effectLst/>
+        </p:spPr>
+        <p:style>
+          <a:lnRef idx="1">
+            <a:schemeClr val="accent1"/>
+          </a:lnRef>
+          <a:fillRef idx="3">
+            <a:schemeClr val="accent1"/>
+          </a:fillRef>
+          <a:effectRef idx="2">
+            <a:schemeClr val="accent1"/>
+          </a:effectRef>
+          <a:fontRef idx="minor">
+            <a:schemeClr val="lt1"/>
+          </a:fontRef>
+        </p:style>
+        <p:txBody>
+          <a:bodyPr rtlCol="0" anchor="ctr"/>
+          <a:lstStyle/>
+          <a:p>
+            <a:pPr algn="ctr"/>
+          </a:p>
+        </p:txBody>
+      </p:sp>
+      <p:sp>
+        <p:nvSpPr>
           <p:cNvPr id="23" name="Rectangle 22"/>
           <p:cNvSpPr/>
           <p:nvPr/>
@@ -9185,7 +10100,7 @@
 </p:sld>
 </file>
 
-<file path=ppt/slides/slide8.xml><?xml version="1.0" encoding="utf-8"?>
+<file path=ppt/slides/slide9.xml><?xml version="1.0" encoding="utf-8"?>
 <p:sld xmlns:a="http://schemas.openxmlformats.org/drawingml/2006/main" xmlns:p="http://schemas.openxmlformats.org/presentationml/2006/main" xmlns:r="http://schemas.openxmlformats.org/officeDocument/2006/relationships">
   <p:cSld>
     <p:bg>

--- a/docs/Skintyee-App-Proposal.pptx
+++ b/docs/Skintyee-App-Proposal.pptx
@@ -3226,7 +3226,7 @@
                 </a:solidFill>
                 <a:latin typeface="Arial"/>
               </a:rPr>
-              <a:t>Skintyee First Nation</a:t>
+              <a:t>Skin Tyee First Nation</a:t>
             </a:r>
           </a:p>
         </p:txBody>
@@ -3631,7 +3631,7 @@
                 </a:solidFill>
                 <a:latin typeface="Arial"/>
               </a:rPr>
-              <a:t>a single mobile + web app for the Skintyee First Nation community.</a:t>
+              <a:t>a single mobile + web app for the Skin Tyee First Nation community.</a:t>
             </a:r>
           </a:p>
           <a:p>
@@ -6780,7 +6780,7 @@
                 </a:solidFill>
                 <a:latin typeface="Arial"/>
               </a:rPr>
-              <a:t>Skintyee App</a:t>
+              <a:t>Skin Tyee App</a:t>
             </a:r>
           </a:p>
         </p:txBody>
@@ -10279,7 +10279,7 @@
                 </a:solidFill>
                 <a:latin typeface="Arial"/>
               </a:rPr>
-              <a:t>for the Skintyee First Nation community.</a:t>
+              <a:t>for the Skin Tyee First Nation community.</a:t>
             </a:r>
           </a:p>
         </p:txBody>
